--- a/content/busi1763/files/Unilever_MindMap_A1.pptx
+++ b/content/busi1763/files/Unilever_MindMap_A1.pptx
@@ -1578,7 +1578,7 @@
                 <a:ea typeface="Calibri" pitchFamily="34" charset="-122"/>
                 <a:cs typeface="Calibri" pitchFamily="34" charset="-120"/>
               </a:rPr>
-              <a:t>Speaker 1</a:t>
+              <a:t>Speaker 1 · Unilever worldwide</a:t>
             </a:r>
             <a:endParaRPr lang="en-US" sz="3400" dirty="0"/>
           </a:p>
@@ -1690,7 +1690,7 @@
                 <a:ea typeface="Calibri" pitchFamily="34" charset="-122"/>
                 <a:cs typeface="Calibri" pitchFamily="34" charset="-120"/>
               </a:rPr>
-              <a:t>5 levels: FTA → customs union →</a:t>
+              <a:t>5 levels · USMCA = free trade area</a:t>
             </a:r>
             <a:endParaRPr lang="en-US" sz="2300" dirty="0"/>
           </a:p>
@@ -1707,7 +1707,7 @@
                 <a:ea typeface="Calibri" pitchFamily="34" charset="-122"/>
                 <a:cs typeface="Calibri" pitchFamily="34" charset="-120"/>
               </a:rPr>
-              <a:t>common market → economic union</a:t>
+              <a:t>(Jul 2020, replaced NAFTA)</a:t>
             </a:r>
             <a:endParaRPr lang="en-US" sz="2300" dirty="0"/>
           </a:p>
@@ -1796,7 +1796,24 @@
                 <a:ea typeface="Calibri" pitchFamily="34" charset="-122"/>
                 <a:cs typeface="Calibri" pitchFamily="34" charset="-120"/>
               </a:rPr>
-              <a:t>Trade creation vs trade diversion</a:t>
+              <a:t>Mexico = US's No. 1 trading partner</a:t>
+            </a:r>
+            <a:endParaRPr lang="en-US" sz="2300" dirty="0"/>
+          </a:p>
+          <a:p>
+            <a:pPr algn="l" indent="0" marL="0">
+              <a:buNone/>
+            </a:pPr>
+            <a:r>
+              <a:rPr lang="en-US" sz="2300" dirty="0">
+                <a:solidFill>
+                  <a:srgbClr val="1A1F36"/>
+                </a:solidFill>
+                <a:latin typeface="Calibri" pitchFamily="34" charset="0"/>
+                <a:ea typeface="Calibri" pitchFamily="34" charset="-122"/>
+                <a:cs typeface="Calibri" pitchFamily="34" charset="-120"/>
+              </a:rPr>
+              <a:t>(2023, $799bn goods trade)</a:t>
             </a:r>
             <a:endParaRPr lang="en-US" sz="2300" dirty="0"/>
           </a:p>
@@ -1885,7 +1902,7 @@
                 <a:ea typeface="Calibri" pitchFamily="34" charset="-122"/>
                 <a:cs typeface="Calibri" pitchFamily="34" charset="-120"/>
               </a:rPr>
-              <a:t>Nov 2020: one UK parent company</a:t>
+              <a:t>Nuevo León plant: $400m (Feb 2023)</a:t>
             </a:r>
             <a:endParaRPr lang="en-US" sz="2300" dirty="0"/>
           </a:p>
@@ -1902,7 +1919,7 @@
                 <a:ea typeface="Calibri" pitchFamily="34" charset="-122"/>
                 <a:cs typeface="Calibri" pitchFamily="34" charset="-120"/>
               </a:rPr>
-              <a:t>(UNCTAD: $81bn cross-border merger)</a:t>
+              <a:t>→ $800m (Apr 2025), 850 jobs</a:t>
             </a:r>
             <a:endParaRPr lang="en-US" sz="2300" dirty="0"/>
           </a:p>
@@ -1991,7 +2008,7 @@
                 <a:ea typeface="Calibri" pitchFamily="34" charset="-122"/>
                 <a:cs typeface="Calibri" pitchFamily="34" charset="-120"/>
               </a:rPr>
-              <a:t>USMCA (Jul 2020) → Mexico plant</a:t>
+              <a:t>Mar 2025: US 25% tariff on Mexico,</a:t>
             </a:r>
             <a:endParaRPr lang="en-US" sz="2300" dirty="0"/>
           </a:p>
@@ -2008,7 +2025,7 @@
                 <a:ea typeface="Calibri" pitchFamily="34" charset="-122"/>
                 <a:cs typeface="Calibri" pitchFamily="34" charset="-120"/>
               </a:rPr>
-              <a:t>$800m (Apr 2025), exports to US &amp; Canada</a:t>
+              <a:t>but USMCA goods exempt</a:t>
             </a:r>
             <a:endParaRPr lang="en-US" sz="2300" dirty="0"/>
           </a:p>
@@ -2097,7 +2114,7 @@
                 <a:ea typeface="Calibri" pitchFamily="34" charset="-122"/>
                 <a:cs typeface="Calibri" pitchFamily="34" charset="-120"/>
               </a:rPr>
-              <a:t>RCEP (Jan 2022): Unilever Indonesia 85%</a:t>
+              <a:t>Benefit: tariff-free access to the US,</a:t>
             </a:r>
             <a:endParaRPr lang="en-US" sz="2300" dirty="0"/>
           </a:p>
@@ -2114,7 +2131,7 @@
                 <a:ea typeface="Calibri" pitchFamily="34" charset="-122"/>
                 <a:cs typeface="Calibri" pitchFamily="34" charset="-120"/>
               </a:rPr>
-              <a:t>AfCFTA (Jan 2021): Unilever Nigeria 76%</a:t>
+              <a:t>Unilever's biggest market</a:t>
             </a:r>
             <a:endParaRPr lang="en-US" sz="2300" dirty="0"/>
           </a:p>
@@ -2192,7 +2209,7 @@
                 <a:ea typeface="Calibri" pitchFamily="34" charset="-122"/>
                 <a:cs typeface="Calibri" pitchFamily="34" charset="-120"/>
               </a:rPr>
-              <a:t>Speaker 2</a:t>
+              <a:t>Speaker 2 · Mexico</a:t>
             </a:r>
             <a:endParaRPr lang="en-US" sz="3400" dirty="0"/>
           </a:p>
@@ -2840,7 +2857,7 @@
                 <a:ea typeface="Calibri" pitchFamily="34" charset="-122"/>
                 <a:cs typeface="Calibri" pitchFamily="34" charset="-120"/>
               </a:rPr>
-              <a:t>Speaker 3</a:t>
+              <a:t>Speaker 3 · UK MNE</a:t>
             </a:r>
             <a:endParaRPr lang="en-US" sz="3400" dirty="0"/>
           </a:p>
@@ -2952,7 +2969,7 @@
                 <a:ea typeface="Calibri" pitchFamily="34" charset="-122"/>
                 <a:cs typeface="Calibri" pitchFamily="34" charset="-120"/>
               </a:rPr>
-              <a:t>OLI model + 4 motives</a:t>
+              <a:t>OLI + 4 motives · US = largest FDI</a:t>
             </a:r>
             <a:endParaRPr lang="en-US" sz="2300" dirty="0"/>
           </a:p>
@@ -2969,7 +2986,7 @@
                 <a:ea typeface="Calibri" pitchFamily="34" charset="-122"/>
                 <a:cs typeface="Calibri" pitchFamily="34" charset="-120"/>
               </a:rPr>
-              <a:t>greenfield vs M&amp;A</a:t>
+              <a:t>host ($279bn, 2024)</a:t>
             </a:r>
             <a:endParaRPr lang="en-US" sz="2300" dirty="0"/>
           </a:p>
@@ -3058,7 +3075,7 @@
                 <a:ea typeface="Calibri" pitchFamily="34" charset="-122"/>
                 <a:cs typeface="Calibri" pitchFamily="34" charset="-120"/>
               </a:rPr>
-              <a:t>Greenfield: China €100m (Jun 2020)</a:t>
+              <a:t>US turnover €9.4bn (2020) → €12.5bn</a:t>
             </a:r>
             <a:endParaRPr lang="en-US" sz="2300" dirty="0"/>
           </a:p>
@@ -3075,7 +3092,7 @@
                 <a:ea typeface="Calibri" pitchFamily="34" charset="-122"/>
                 <a:cs typeface="Calibri" pitchFamily="34" charset="-120"/>
               </a:rPr>
-              <a:t>Mexico $800m (Apr 2025), 850 jobs</a:t>
+              <a:t>(2024), about 1/5 of the group</a:t>
             </a:r>
             <a:endParaRPr lang="en-US" sz="2300" dirty="0"/>
           </a:p>
@@ -3181,7 +3198,7 @@
                 <a:ea typeface="Calibri" pitchFamily="34" charset="-122"/>
                 <a:cs typeface="Calibri" pitchFamily="34" charset="-120"/>
               </a:rPr>
-              <a:t>Dr. Squatch €1.2bn (Sep 2025)</a:t>
+              <a:t>Nutrafol → 80% (Jul 2022)</a:t>
             </a:r>
             <a:endParaRPr lang="en-US" sz="2300" dirty="0"/>
           </a:p>
@@ -3270,7 +3287,7 @@
                 <a:ea typeface="Calibri" pitchFamily="34" charset="-122"/>
                 <a:cs typeface="Calibri" pitchFamily="34" charset="-120"/>
               </a:rPr>
-              <a:t>Sell: tea €4.6bn, gain €2.3bn (Jul 2022)</a:t>
+              <a:t>K18 (Feb 2024)</a:t>
             </a:r>
             <a:endParaRPr lang="en-US" sz="2300" dirty="0"/>
           </a:p>
@@ -3287,7 +3304,7 @@
                 <a:ea typeface="Calibri" pitchFamily="34" charset="-122"/>
                 <a:cs typeface="Calibri" pitchFamily="34" charset="-120"/>
               </a:rPr>
-              <a:t>Magnum demerger, gain €3.4bn (Dec 2025)</a:t>
+              <a:t>Dr. Squatch €1.2bn (Sep 2025)</a:t>
             </a:r>
             <a:endParaRPr lang="en-US" sz="2300" dirty="0"/>
           </a:p>
@@ -3376,7 +3393,24 @@
                 <a:ea typeface="Calibri" pitchFamily="34" charset="-122"/>
                 <a:cs typeface="Calibri" pitchFamily="34" charset="-120"/>
               </a:rPr>
-              <a:t>World FDI: $1tn (2020) → $1.6tn (2025)</a:t>
+              <a:t>Benefit: 70% of US Beauty &amp; Wellbeing</a:t>
+            </a:r>
+            <a:endParaRPr lang="en-US" sz="2300" dirty="0"/>
+          </a:p>
+          <a:p>
+            <a:pPr algn="l" indent="0" marL="0">
+              <a:buNone/>
+            </a:pPr>
+            <a:r>
+              <a:rPr lang="en-US" sz="2300" dirty="0">
+                <a:solidFill>
+                  <a:srgbClr val="1A1F36"/>
+                </a:solidFill>
+                <a:latin typeface="Calibri" pitchFamily="34" charset="0"/>
+                <a:ea typeface="Calibri" pitchFamily="34" charset="-122"/>
+                <a:cs typeface="Calibri" pitchFamily="34" charset="-120"/>
+              </a:rPr>
+              <a:t>sales from premium brands (2024)</a:t>
             </a:r>
             <a:endParaRPr lang="en-US" sz="2300" dirty="0"/>
           </a:p>
@@ -3454,7 +3488,7 @@
                 <a:ea typeface="Calibri" pitchFamily="34" charset="-122"/>
                 <a:cs typeface="Calibri" pitchFamily="34" charset="-120"/>
               </a:rPr>
-              <a:t>Speaker 4</a:t>
+              <a:t>Speaker 4 · United States</a:t>
             </a:r>
             <a:endParaRPr lang="en-US" sz="3400" dirty="0"/>
           </a:p>
@@ -3591,7 +3625,7 @@
                 <a:ea typeface="Calibri" pitchFamily="34" charset="-122"/>
                 <a:cs typeface="Calibri" pitchFamily="34" charset="-120"/>
               </a:rPr>
-              <a:t>Sources: Unilever PLC Annual Reports on Form 20-F 2020–2025; UNCTAD World Investment Reports 2021 and 2026; full Harvard references on our presentation slides.</a:t>
+              <a:t>Sources: Unilever PLC Annual Reports on Form 20-F 2020–2025; UNCTAD World Investment Report 2025; US Census Bureau; USTR; full Harvard references on our presentation slides.</a:t>
             </a:r>
             <a:endParaRPr lang="en-US" sz="1600" dirty="0"/>
           </a:p>

--- a/content/busi1763/files/Unilever_MindMap_A1.pptx
+++ b/content/busi1763/files/Unilever_MindMap_A1.pptx
@@ -922,8 +922,8 @@
         </p:nvSpPr>
         <p:spPr>
           <a:xfrm>
-            <a:off x="548640" y="1280160"/>
-            <a:ext cx="29178504" cy="548640"/>
+            <a:off x="8229600" y="1234440"/>
+            <a:ext cx="13816584" cy="548640"/>
           </a:xfrm>
           <a:prstGeom prst="rect">
             <a:avLst/>
@@ -947,7 +947,7 @@
                 <a:ea typeface="Calibri" pitchFamily="34" charset="-122"/>
                 <a:cs typeface="Calibri" pitchFamily="34" charset="-120"/>
               </a:rPr>
-              <a:t>BUSI 1763 Dynamics of Global Business · Group Mind Map · Data: 2020–2025</a:t>
+              <a:t>BUSI 1763 · Group Mind Map · Completed events, Jan 2020 – Dec 2025</a:t>
             </a:r>
             <a:endParaRPr lang="en-US" sz="2600" dirty="0"/>
           </a:p>
@@ -984,8 +984,8 @@
         </p:nvSpPr>
         <p:spPr>
           <a:xfrm>
-            <a:off x="7406640" y="2340864"/>
-            <a:ext cx="457200" cy="3511296"/>
+            <a:off x="7680960" y="2523744"/>
+            <a:ext cx="182880" cy="3328416"/>
           </a:xfrm>
           <a:prstGeom prst="line">
             <a:avLst/>
@@ -1007,12 +1007,12 @@
         </p:nvSpPr>
         <p:spPr>
           <a:xfrm>
-            <a:off x="457200" y="1609344"/>
-            <a:ext cx="6949440" cy="1463040"/>
+            <a:off x="457200" y="1815084"/>
+            <a:ext cx="7223760" cy="1417320"/>
           </a:xfrm>
           <a:prstGeom prst="roundRect">
             <a:avLst>
-              <a:gd name="adj" fmla="val 15625"/>
+              <a:gd name="adj" fmla="val 16129"/>
             </a:avLst>
           </a:prstGeom>
           <a:solidFill>
@@ -1034,8 +1034,8 @@
         </p:nvSpPr>
         <p:spPr>
           <a:xfrm>
-            <a:off x="685800" y="1609344"/>
-            <a:ext cx="6492240" cy="1463040"/>
+            <a:off x="685800" y="1815084"/>
+            <a:ext cx="6766560" cy="1417320"/>
           </a:xfrm>
           <a:prstGeom prst="rect">
             <a:avLst/>
@@ -1051,7 +1051,24 @@
               <a:buNone/>
             </a:pPr>
             <a:r>
-              <a:rPr lang="en-US" sz="2300" dirty="0">
+              <a:rPr lang="en-US" sz="2500" b="1" dirty="0">
+                <a:solidFill>
+                  <a:srgbClr val="1F36C7"/>
+                </a:solidFill>
+                <a:latin typeface="Calibri" pitchFamily="34" charset="0"/>
+                <a:ea typeface="Calibri" pitchFamily="34" charset="-122"/>
+                <a:cs typeface="Calibri" pitchFamily="34" charset="-120"/>
+              </a:rPr>
+              <a:t>Levitt: one world market</a:t>
+            </a:r>
+            <a:endParaRPr lang="en-US" sz="2500" dirty="0"/>
+          </a:p>
+          <a:p>
+            <a:pPr algn="l" indent="0" marL="0">
+              <a:buNone/>
+            </a:pPr>
+            <a:r>
+              <a:rPr lang="en-US" sz="2000" dirty="0">
                 <a:solidFill>
                   <a:srgbClr val="1A1F36"/>
                 </a:solidFill>
@@ -1059,26 +1076,9 @@
                 <a:ea typeface="Calibri" pitchFamily="34" charset="-122"/>
                 <a:cs typeface="Calibri" pitchFamily="34" charset="-120"/>
               </a:rPr>
-              <a:t>Levitt: one world market</a:t>
-            </a:r>
-            <a:endParaRPr lang="en-US" sz="2300" dirty="0"/>
-          </a:p>
-          <a:p>
-            <a:pPr algn="l" indent="0" marL="0">
-              <a:buNone/>
-            </a:pPr>
-            <a:r>
-              <a:rPr lang="en-US" sz="2300" dirty="0">
-                <a:solidFill>
-                  <a:srgbClr val="1A1F36"/>
-                </a:solidFill>
-                <a:latin typeface="Calibri" pitchFamily="34" charset="0"/>
-                <a:ea typeface="Calibri" pitchFamily="34" charset="-122"/>
-                <a:cs typeface="Calibri" pitchFamily="34" charset="-120"/>
-              </a:rPr>
-              <a:t>5 drivers · markets + production</a:t>
-            </a:r>
-            <a:endParaRPr lang="en-US" sz="2300" dirty="0"/>
+              <a:t>the same global brands everywhere (e.g. Dove)</a:t>
+            </a:r>
+            <a:endParaRPr lang="en-US" sz="2500" dirty="0"/>
           </a:p>
         </p:txBody>
       </p:sp>
@@ -1090,8 +1090,8 @@
         </p:nvSpPr>
         <p:spPr>
           <a:xfrm>
-            <a:off x="7406640" y="4096512"/>
-            <a:ext cx="457200" cy="1755648"/>
+            <a:off x="7680960" y="4187952"/>
+            <a:ext cx="182880" cy="1664208"/>
           </a:xfrm>
           <a:prstGeom prst="line">
             <a:avLst/>
@@ -1113,12 +1113,12 @@
         </p:nvSpPr>
         <p:spPr>
           <a:xfrm>
-            <a:off x="457200" y="3364992"/>
-            <a:ext cx="6949440" cy="1463040"/>
+            <a:off x="457200" y="3479292"/>
+            <a:ext cx="7223760" cy="1417320"/>
           </a:xfrm>
           <a:prstGeom prst="roundRect">
             <a:avLst>
-              <a:gd name="adj" fmla="val 15625"/>
+              <a:gd name="adj" fmla="val 16129"/>
             </a:avLst>
           </a:prstGeom>
           <a:solidFill>
@@ -1140,8 +1140,8 @@
         </p:nvSpPr>
         <p:spPr>
           <a:xfrm>
-            <a:off x="685800" y="3364992"/>
-            <a:ext cx="6492240" cy="1463040"/>
+            <a:off x="685800" y="3479292"/>
+            <a:ext cx="6766560" cy="1417320"/>
           </a:xfrm>
           <a:prstGeom prst="rect">
             <a:avLst/>
@@ -1157,7 +1157,24 @@
               <a:buNone/>
             </a:pPr>
             <a:r>
-              <a:rPr lang="en-US" sz="2300" dirty="0">
+              <a:rPr lang="en-US" sz="2500" b="1" dirty="0">
+                <a:solidFill>
+                  <a:srgbClr val="1F36C7"/>
+                </a:solidFill>
+                <a:latin typeface="Calibri" pitchFamily="34" charset="0"/>
+                <a:ea typeface="Calibri" pitchFamily="34" charset="-122"/>
+                <a:cs typeface="Calibri" pitchFamily="34" charset="-120"/>
+              </a:rPr>
+              <a:t>Five drivers</a:t>
+            </a:r>
+            <a:endParaRPr lang="en-US" sz="2500" dirty="0"/>
+          </a:p>
+          <a:p>
+            <a:pPr algn="l" indent="0" marL="0">
+              <a:buNone/>
+            </a:pPr>
+            <a:r>
+              <a:rPr lang="en-US" sz="2000" dirty="0">
                 <a:solidFill>
                   <a:srgbClr val="1A1F36"/>
                 </a:solidFill>
@@ -1165,26 +1182,9 @@
                 <a:ea typeface="Calibri" pitchFamily="34" charset="-122"/>
                 <a:cs typeface="Calibri" pitchFamily="34" charset="-120"/>
               </a:rPr>
-              <a:t>~190 countries · 3.4bn people use</a:t>
-            </a:r>
-            <a:endParaRPr lang="en-US" sz="2300" dirty="0"/>
-          </a:p>
-          <a:p>
-            <a:pPr algn="l" indent="0" marL="0">
-              <a:buNone/>
-            </a:pPr>
-            <a:r>
-              <a:rPr lang="en-US" sz="2300" dirty="0">
-                <a:solidFill>
-                  <a:srgbClr val="1A1F36"/>
-                </a:solidFill>
-                <a:latin typeface="Calibri" pitchFamily="34" charset="0"/>
-                <a:ea typeface="Calibri" pitchFamily="34" charset="-122"/>
-                <a:cs typeface="Calibri" pitchFamily="34" charset="-120"/>
-              </a:rPr>
-              <a:t>its products every day</a:t>
-            </a:r>
-            <a:endParaRPr lang="en-US" sz="2300" dirty="0"/>
+              <a:t>political · technology · market · cost · competition</a:t>
+            </a:r>
+            <a:endParaRPr lang="en-US" sz="2500" dirty="0"/>
           </a:p>
         </p:txBody>
       </p:sp>
@@ -1195,9 +1195,9 @@
           <p:nvPr/>
         </p:nvSpPr>
         <p:spPr>
-          <a:xfrm flipV="1">
-            <a:off x="7406640" y="5852160"/>
-            <a:ext cx="457200" cy="9144"/>
+          <a:xfrm>
+            <a:off x="7680960" y="5852160"/>
+            <a:ext cx="182880" cy="9144"/>
           </a:xfrm>
           <a:prstGeom prst="line">
             <a:avLst/>
@@ -1219,12 +1219,12 @@
         </p:nvSpPr>
         <p:spPr>
           <a:xfrm>
-            <a:off x="457200" y="5120640"/>
-            <a:ext cx="6949440" cy="1463040"/>
+            <a:off x="457200" y="5143500"/>
+            <a:ext cx="7223760" cy="1417320"/>
           </a:xfrm>
           <a:prstGeom prst="roundRect">
             <a:avLst>
-              <a:gd name="adj" fmla="val 15625"/>
+              <a:gd name="adj" fmla="val 16129"/>
             </a:avLst>
           </a:prstGeom>
           <a:solidFill>
@@ -1246,8 +1246,8 @@
         </p:nvSpPr>
         <p:spPr>
           <a:xfrm>
-            <a:off x="685800" y="5120640"/>
-            <a:ext cx="6492240" cy="1463040"/>
+            <a:off x="685800" y="5143500"/>
+            <a:ext cx="6766560" cy="1417320"/>
           </a:xfrm>
           <a:prstGeom prst="rect">
             <a:avLst/>
@@ -1263,7 +1263,24 @@
               <a:buNone/>
             </a:pPr>
             <a:r>
-              <a:rPr lang="en-US" sz="2300" dirty="0">
+              <a:rPr lang="en-US" sz="2500" b="1" dirty="0">
+                <a:solidFill>
+                  <a:srgbClr val="1F36C7"/>
+                </a:solidFill>
+                <a:latin typeface="Calibri" pitchFamily="34" charset="0"/>
+                <a:ea typeface="Calibri" pitchFamily="34" charset="-122"/>
+                <a:cs typeface="Calibri" pitchFamily="34" charset="-120"/>
+              </a:rPr>
+              <a:t>Globalisation of markets</a:t>
+            </a:r>
+            <a:endParaRPr lang="en-US" sz="2500" dirty="0"/>
+          </a:p>
+          <a:p>
+            <a:pPr algn="l" indent="0" marL="0">
+              <a:buNone/>
+            </a:pPr>
+            <a:r>
+              <a:rPr lang="en-US" sz="2000" dirty="0">
                 <a:solidFill>
                   <a:srgbClr val="1A1F36"/>
                 </a:solidFill>
@@ -1271,26 +1288,9 @@
                 <a:ea typeface="Calibri" pitchFamily="34" charset="-122"/>
                 <a:cs typeface="Calibri" pitchFamily="34" charset="-120"/>
               </a:rPr>
-              <a:t>59% of turnover from emerging</a:t>
-            </a:r>
-            <a:endParaRPr lang="en-US" sz="2300" dirty="0"/>
-          </a:p>
-          <a:p>
-            <a:pPr algn="l" indent="0" marL="0">
-              <a:buNone/>
-            </a:pPr>
-            <a:r>
-              <a:rPr lang="en-US" sz="2300" dirty="0">
-                <a:solidFill>
-                  <a:srgbClr val="1A1F36"/>
-                </a:solidFill>
-                <a:latin typeface="Calibri" pitchFamily="34" charset="0"/>
-                <a:ea typeface="Calibri" pitchFamily="34" charset="-122"/>
-                <a:cs typeface="Calibri" pitchFamily="34" charset="-120"/>
-              </a:rPr>
-              <a:t>markets (2025) · Europe only 19%</a:t>
-            </a:r>
-            <a:endParaRPr lang="en-US" sz="2300" dirty="0"/>
+              <a:t>sells in ~190 countries; growth from emerging markets</a:t>
+            </a:r>
+            <a:endParaRPr lang="en-US" sz="2500" dirty="0"/>
           </a:p>
         </p:txBody>
       </p:sp>
@@ -1302,8 +1302,8 @@
         </p:nvSpPr>
         <p:spPr>
           <a:xfrm flipV="1">
-            <a:off x="7406640" y="5852160"/>
-            <a:ext cx="457200" cy="1755648"/>
+            <a:off x="7680960" y="5852160"/>
+            <a:ext cx="182880" cy="1664208"/>
           </a:xfrm>
           <a:prstGeom prst="line">
             <a:avLst/>
@@ -1325,12 +1325,12 @@
         </p:nvSpPr>
         <p:spPr>
           <a:xfrm>
-            <a:off x="457200" y="6876288"/>
-            <a:ext cx="6949440" cy="1463040"/>
+            <a:off x="457200" y="6807708"/>
+            <a:ext cx="7223760" cy="1417320"/>
           </a:xfrm>
           <a:prstGeom prst="roundRect">
             <a:avLst>
-              <a:gd name="adj" fmla="val 15625"/>
+              <a:gd name="adj" fmla="val 16129"/>
             </a:avLst>
           </a:prstGeom>
           <a:solidFill>
@@ -1352,8 +1352,8 @@
         </p:nvSpPr>
         <p:spPr>
           <a:xfrm>
-            <a:off x="685800" y="6876288"/>
-            <a:ext cx="6492240" cy="1463040"/>
+            <a:off x="685800" y="6807708"/>
+            <a:ext cx="6766560" cy="1417320"/>
           </a:xfrm>
           <a:prstGeom prst="rect">
             <a:avLst/>
@@ -1369,7 +1369,24 @@
               <a:buNone/>
             </a:pPr>
             <a:r>
-              <a:rPr lang="en-US" sz="2300" dirty="0">
+              <a:rPr lang="en-US" sz="2500" b="1" dirty="0">
+                <a:solidFill>
+                  <a:srgbClr val="1F36C7"/>
+                </a:solidFill>
+                <a:latin typeface="Calibri" pitchFamily="34" charset="0"/>
+                <a:ea typeface="Calibri" pitchFamily="34" charset="-122"/>
+                <a:cs typeface="Calibri" pitchFamily="34" charset="-120"/>
+              </a:rPr>
+              <a:t>Globalisation of production</a:t>
+            </a:r>
+            <a:endParaRPr lang="en-US" sz="2500" dirty="0"/>
+          </a:p>
+          <a:p>
+            <a:pPr algn="l" indent="0" marL="0">
+              <a:buNone/>
+            </a:pPr>
+            <a:r>
+              <a:rPr lang="en-US" sz="2000" dirty="0">
                 <a:solidFill>
                   <a:srgbClr val="1A1F36"/>
                 </a:solidFill>
@@ -1377,26 +1394,9 @@
                 <a:ea typeface="Calibri" pitchFamily="34" charset="-122"/>
                 <a:cs typeface="Calibri" pitchFamily="34" charset="-120"/>
               </a:rPr>
-              <a:t>30 Power Brands = 78% of turnover</a:t>
-            </a:r>
-            <a:endParaRPr lang="en-US" sz="2300" dirty="0"/>
-          </a:p>
-          <a:p>
-            <a:pPr algn="l" indent="0" marL="0">
-              <a:buNone/>
-            </a:pPr>
-            <a:r>
-              <a:rPr lang="en-US" sz="2300" dirty="0">
-                <a:solidFill>
-                  <a:srgbClr val="1A1F36"/>
-                </a:solidFill>
-                <a:latin typeface="Calibri" pitchFamily="34" charset="0"/>
-                <a:ea typeface="Calibri" pitchFamily="34" charset="-122"/>
-                <a:cs typeface="Calibri" pitchFamily="34" charset="-120"/>
-              </a:rPr>
-              <a:t>280+ factories (2023)</a:t>
-            </a:r>
-            <a:endParaRPr lang="en-US" sz="2300" dirty="0"/>
+              <a:t>global factory network → economies of scale</a:t>
+            </a:r>
+            <a:endParaRPr lang="en-US" sz="2500" dirty="0"/>
           </a:p>
         </p:txBody>
       </p:sp>
@@ -1408,8 +1408,8 @@
         </p:nvSpPr>
         <p:spPr>
           <a:xfrm flipV="1">
-            <a:off x="7406640" y="5852160"/>
-            <a:ext cx="457200" cy="3511296"/>
+            <a:off x="7680960" y="5852160"/>
+            <a:ext cx="182880" cy="3328416"/>
           </a:xfrm>
           <a:prstGeom prst="line">
             <a:avLst/>
@@ -1431,12 +1431,12 @@
         </p:nvSpPr>
         <p:spPr>
           <a:xfrm>
-            <a:off x="457200" y="8631936"/>
-            <a:ext cx="6949440" cy="1463040"/>
+            <a:off x="457200" y="8471916"/>
+            <a:ext cx="7223760" cy="1417320"/>
           </a:xfrm>
           <a:prstGeom prst="roundRect">
             <a:avLst>
-              <a:gd name="adj" fmla="val 15625"/>
+              <a:gd name="adj" fmla="val 16129"/>
             </a:avLst>
           </a:prstGeom>
           <a:solidFill>
@@ -1458,8 +1458,8 @@
         </p:nvSpPr>
         <p:spPr>
           <a:xfrm>
-            <a:off x="685800" y="8631936"/>
-            <a:ext cx="6492240" cy="1463040"/>
+            <a:off x="685800" y="8471916"/>
+            <a:ext cx="6766560" cy="1417320"/>
           </a:xfrm>
           <a:prstGeom prst="rect">
             <a:avLst/>
@@ -1475,7 +1475,24 @@
               <a:buNone/>
             </a:pPr>
             <a:r>
-              <a:rPr lang="en-US" sz="2300" dirty="0">
+              <a:rPr lang="en-US" sz="2500" b="1" dirty="0">
+                <a:solidFill>
+                  <a:srgbClr val="1F36C7"/>
+                </a:solidFill>
+                <a:latin typeface="Calibri" pitchFamily="34" charset="0"/>
+                <a:ea typeface="Calibri" pitchFamily="34" charset="-122"/>
+                <a:cs typeface="Calibri" pitchFamily="34" charset="-120"/>
+              </a:rPr>
+              <a:t>Risks of globalisation</a:t>
+            </a:r>
+            <a:endParaRPr lang="en-US" sz="2500" dirty="0"/>
+          </a:p>
+          <a:p>
+            <a:pPr algn="l" indent="0" marL="0">
+              <a:buNone/>
+            </a:pPr>
+            <a:r>
+              <a:rPr lang="en-US" sz="2000" dirty="0">
                 <a:solidFill>
                   <a:srgbClr val="1A1F36"/>
                 </a:solidFill>
@@ -1483,26 +1500,9 @@
                 <a:ea typeface="Calibri" pitchFamily="34" charset="-122"/>
                 <a:cs typeface="Calibri" pitchFamily="34" charset="-120"/>
               </a:rPr>
-              <a:t>Risks: COVID (Mar 2020) · inflation 2022</a:t>
-            </a:r>
-            <a:endParaRPr lang="en-US" sz="2300" dirty="0"/>
-          </a:p>
-          <a:p>
-            <a:pPr algn="l" indent="0" marL="0">
-              <a:buNone/>
-            </a:pPr>
-            <a:r>
-              <a:rPr lang="en-US" sz="2300" dirty="0">
-                <a:solidFill>
-                  <a:srgbClr val="1A1F36"/>
-                </a:solidFill>
-                <a:latin typeface="Calibri" pitchFamily="34" charset="0"/>
-                <a:ea typeface="Calibri" pitchFamily="34" charset="-122"/>
-                <a:cs typeface="Calibri" pitchFamily="34" charset="-120"/>
-              </a:rPr>
-              <a:t>(prices +11.3%) · Russia exit (Oct 2024)</a:t>
-            </a:r>
-            <a:endParaRPr lang="en-US" sz="2300" dirty="0"/>
+              <a:t>COVID-19 (Mar 2020) · war in Ukraine (Mar 2022)</a:t>
+            </a:r>
+            <a:endParaRPr lang="en-US" sz="2500" dirty="0"/>
           </a:p>
         </p:txBody>
       </p:sp>
@@ -1615,8 +1615,8 @@
         </p:nvSpPr>
         <p:spPr>
           <a:xfrm flipV="1">
-            <a:off x="22411944" y="2340864"/>
-            <a:ext cx="457200" cy="3511296"/>
+            <a:off x="22411944" y="2523744"/>
+            <a:ext cx="182880" cy="3328416"/>
           </a:xfrm>
           <a:prstGeom prst="line">
             <a:avLst/>
@@ -1638,12 +1638,12 @@
         </p:nvSpPr>
         <p:spPr>
           <a:xfrm>
-            <a:off x="22869144" y="1609344"/>
-            <a:ext cx="6949440" cy="1463040"/>
+            <a:off x="22594824" y="1815084"/>
+            <a:ext cx="7223760" cy="1417320"/>
           </a:xfrm>
           <a:prstGeom prst="roundRect">
             <a:avLst>
-              <a:gd name="adj" fmla="val 15625"/>
+              <a:gd name="adj" fmla="val 16129"/>
             </a:avLst>
           </a:prstGeom>
           <a:solidFill>
@@ -1665,8 +1665,8 @@
         </p:nvSpPr>
         <p:spPr>
           <a:xfrm>
-            <a:off x="23097744" y="1609344"/>
-            <a:ext cx="6492240" cy="1463040"/>
+            <a:off x="22823424" y="1815084"/>
+            <a:ext cx="6766560" cy="1417320"/>
           </a:xfrm>
           <a:prstGeom prst="rect">
             <a:avLst/>
@@ -1682,7 +1682,24 @@
               <a:buNone/>
             </a:pPr>
             <a:r>
-              <a:rPr lang="en-US" sz="2300" dirty="0">
+              <a:rPr lang="en-US" sz="2500" b="1" dirty="0">
+                <a:solidFill>
+                  <a:srgbClr val="0F8A6B"/>
+                </a:solidFill>
+                <a:latin typeface="Calibri" pitchFamily="34" charset="0"/>
+                <a:ea typeface="Calibri" pitchFamily="34" charset="-122"/>
+                <a:cs typeface="Calibri" pitchFamily="34" charset="-120"/>
+              </a:rPr>
+              <a:t>Five levels of integration</a:t>
+            </a:r>
+            <a:endParaRPr lang="en-US" sz="2500" dirty="0"/>
+          </a:p>
+          <a:p>
+            <a:pPr algn="l" indent="0" marL="0">
+              <a:buNone/>
+            </a:pPr>
+            <a:r>
+              <a:rPr lang="en-US" sz="2000" dirty="0">
                 <a:solidFill>
                   <a:srgbClr val="1A1F36"/>
                 </a:solidFill>
@@ -1690,26 +1707,9 @@
                 <a:ea typeface="Calibri" pitchFamily="34" charset="-122"/>
                 <a:cs typeface="Calibri" pitchFamily="34" charset="-120"/>
               </a:rPr>
-              <a:t>5 levels · USMCA = free trade area</a:t>
-            </a:r>
-            <a:endParaRPr lang="en-US" sz="2300" dirty="0"/>
-          </a:p>
-          <a:p>
-            <a:pPr algn="l" indent="0" marL="0">
-              <a:buNone/>
-            </a:pPr>
-            <a:r>
-              <a:rPr lang="en-US" sz="2300" dirty="0">
-                <a:solidFill>
-                  <a:srgbClr val="1A1F36"/>
-                </a:solidFill>
-                <a:latin typeface="Calibri" pitchFamily="34" charset="0"/>
-                <a:ea typeface="Calibri" pitchFamily="34" charset="-122"/>
-                <a:cs typeface="Calibri" pitchFamily="34" charset="-120"/>
-              </a:rPr>
-              <a:t>(Jul 2020, replaced NAFTA)</a:t>
-            </a:r>
-            <a:endParaRPr lang="en-US" sz="2300" dirty="0"/>
+              <a:t>FTA → customs union → common market → union</a:t>
+            </a:r>
+            <a:endParaRPr lang="en-US" sz="2500" dirty="0"/>
           </a:p>
         </p:txBody>
       </p:sp>
@@ -1721,8 +1721,8 @@
         </p:nvSpPr>
         <p:spPr>
           <a:xfrm flipV="1">
-            <a:off x="22411944" y="4096512"/>
-            <a:ext cx="457200" cy="1755648"/>
+            <a:off x="22411944" y="4187952"/>
+            <a:ext cx="182880" cy="1664208"/>
           </a:xfrm>
           <a:prstGeom prst="line">
             <a:avLst/>
@@ -1744,12 +1744,12 @@
         </p:nvSpPr>
         <p:spPr>
           <a:xfrm>
-            <a:off x="22869144" y="3364992"/>
-            <a:ext cx="6949440" cy="1463040"/>
+            <a:off x="22594824" y="3479292"/>
+            <a:ext cx="7223760" cy="1417320"/>
           </a:xfrm>
           <a:prstGeom prst="roundRect">
             <a:avLst>
-              <a:gd name="adj" fmla="val 15625"/>
+              <a:gd name="adj" fmla="val 16129"/>
             </a:avLst>
           </a:prstGeom>
           <a:solidFill>
@@ -1771,8 +1771,8 @@
         </p:nvSpPr>
         <p:spPr>
           <a:xfrm>
-            <a:off x="23097744" y="3364992"/>
-            <a:ext cx="6492240" cy="1463040"/>
+            <a:off x="22823424" y="3479292"/>
+            <a:ext cx="6766560" cy="1417320"/>
           </a:xfrm>
           <a:prstGeom prst="rect">
             <a:avLst/>
@@ -1788,7 +1788,24 @@
               <a:buNone/>
             </a:pPr>
             <a:r>
-              <a:rPr lang="en-US" sz="2300" dirty="0">
+              <a:rPr lang="en-US" sz="2500" b="1" dirty="0">
+                <a:solidFill>
+                  <a:srgbClr val="0F8A6B"/>
+                </a:solidFill>
+                <a:latin typeface="Calibri" pitchFamily="34" charset="0"/>
+                <a:ea typeface="Calibri" pitchFamily="34" charset="-122"/>
+                <a:cs typeface="Calibri" pitchFamily="34" charset="-120"/>
+              </a:rPr>
+              <a:t>USMCA = free trade area</a:t>
+            </a:r>
+            <a:endParaRPr lang="en-US" sz="2500" dirty="0"/>
+          </a:p>
+          <a:p>
+            <a:pPr algn="l" indent="0" marL="0">
+              <a:buNone/>
+            </a:pPr>
+            <a:r>
+              <a:rPr lang="en-US" sz="2000" dirty="0">
                 <a:solidFill>
                   <a:srgbClr val="1A1F36"/>
                 </a:solidFill>
@@ -1796,26 +1813,9 @@
                 <a:ea typeface="Calibri" pitchFamily="34" charset="-122"/>
                 <a:cs typeface="Calibri" pitchFamily="34" charset="-120"/>
               </a:rPr>
-              <a:t>Mexico = US's No. 1 trading partner</a:t>
-            </a:r>
-            <a:endParaRPr lang="en-US" sz="2300" dirty="0"/>
-          </a:p>
-          <a:p>
-            <a:pPr algn="l" indent="0" marL="0">
-              <a:buNone/>
-            </a:pPr>
-            <a:r>
-              <a:rPr lang="en-US" sz="2300" dirty="0">
-                <a:solidFill>
-                  <a:srgbClr val="1A1F36"/>
-                </a:solidFill>
-                <a:latin typeface="Calibri" pitchFamily="34" charset="0"/>
-                <a:ea typeface="Calibri" pitchFamily="34" charset="-122"/>
-                <a:cs typeface="Calibri" pitchFamily="34" charset="-120"/>
-              </a:rPr>
-              <a:t>(2023, $799bn goods trade)</a:t>
-            </a:r>
-            <a:endParaRPr lang="en-US" sz="2300" dirty="0"/>
+              <a:t>US · Mexico · Canada; replaced NAFTA (Jul 2020)</a:t>
+            </a:r>
+            <a:endParaRPr lang="en-US" sz="2500" dirty="0"/>
           </a:p>
         </p:txBody>
       </p:sp>
@@ -1828,7 +1828,7 @@
         <p:spPr>
           <a:xfrm>
             <a:off x="22411944" y="5852160"/>
-            <a:ext cx="457200" cy="9144"/>
+            <a:ext cx="182880" cy="9144"/>
           </a:xfrm>
           <a:prstGeom prst="line">
             <a:avLst/>
@@ -1850,12 +1850,12 @@
         </p:nvSpPr>
         <p:spPr>
           <a:xfrm>
-            <a:off x="22869144" y="5120640"/>
-            <a:ext cx="6949440" cy="1463040"/>
+            <a:off x="22594824" y="5143500"/>
+            <a:ext cx="7223760" cy="1417320"/>
           </a:xfrm>
           <a:prstGeom prst="roundRect">
             <a:avLst>
-              <a:gd name="adj" fmla="val 15625"/>
+              <a:gd name="adj" fmla="val 16129"/>
             </a:avLst>
           </a:prstGeom>
           <a:solidFill>
@@ -1877,8 +1877,8 @@
         </p:nvSpPr>
         <p:spPr>
           <a:xfrm>
-            <a:off x="23097744" y="5120640"/>
-            <a:ext cx="6492240" cy="1463040"/>
+            <a:off x="22823424" y="5143500"/>
+            <a:ext cx="6766560" cy="1417320"/>
           </a:xfrm>
           <a:prstGeom prst="rect">
             <a:avLst/>
@@ -1894,7 +1894,24 @@
               <a:buNone/>
             </a:pPr>
             <a:r>
-              <a:rPr lang="en-US" sz="2300" dirty="0">
+              <a:rPr lang="en-US" sz="2500" b="1" dirty="0">
+                <a:solidFill>
+                  <a:srgbClr val="0F8A6B"/>
+                </a:solidFill>
+                <a:latin typeface="Calibri" pitchFamily="34" charset="0"/>
+                <a:ea typeface="Calibri" pitchFamily="34" charset="-122"/>
+                <a:cs typeface="Calibri" pitchFamily="34" charset="-120"/>
+              </a:rPr>
+              <a:t>Rules of origin</a:t>
+            </a:r>
+            <a:endParaRPr lang="en-US" sz="2500" dirty="0"/>
+          </a:p>
+          <a:p>
+            <a:pPr algn="l" indent="0" marL="0">
+              <a:buNone/>
+            </a:pPr>
+            <a:r>
+              <a:rPr lang="en-US" sz="2000" dirty="0">
                 <a:solidFill>
                   <a:srgbClr val="1A1F36"/>
                 </a:solidFill>
@@ -1902,26 +1919,9 @@
                 <a:ea typeface="Calibri" pitchFamily="34" charset="-122"/>
                 <a:cs typeface="Calibri" pitchFamily="34" charset="-120"/>
               </a:rPr>
-              <a:t>Nuevo León plant: $400m (Feb 2023)</a:t>
-            </a:r>
-            <a:endParaRPr lang="en-US" sz="2300" dirty="0"/>
-          </a:p>
-          <a:p>
-            <a:pPr algn="l" indent="0" marL="0">
-              <a:buNone/>
-            </a:pPr>
-            <a:r>
-              <a:rPr lang="en-US" sz="2300" dirty="0">
-                <a:solidFill>
-                  <a:srgbClr val="1A1F36"/>
-                </a:solidFill>
-                <a:latin typeface="Calibri" pitchFamily="34" charset="0"/>
-                <a:ea typeface="Calibri" pitchFamily="34" charset="-122"/>
-                <a:cs typeface="Calibri" pitchFamily="34" charset="-120"/>
-              </a:rPr>
-              <a:t>→ $800m (Apr 2025), 850 jobs</a:t>
-            </a:r>
-            <a:endParaRPr lang="en-US" sz="2300" dirty="0"/>
+              <a:t>qualifying goods cross the borders tariff-free</a:t>
+            </a:r>
+            <a:endParaRPr lang="en-US" sz="2500" dirty="0"/>
           </a:p>
         </p:txBody>
       </p:sp>
@@ -1934,7 +1934,7 @@
         <p:spPr>
           <a:xfrm>
             <a:off x="22411944" y="5852160"/>
-            <a:ext cx="457200" cy="1755648"/>
+            <a:ext cx="182880" cy="1664208"/>
           </a:xfrm>
           <a:prstGeom prst="line">
             <a:avLst/>
@@ -1956,12 +1956,12 @@
         </p:nvSpPr>
         <p:spPr>
           <a:xfrm>
-            <a:off x="22869144" y="6876288"/>
-            <a:ext cx="6949440" cy="1463040"/>
+            <a:off x="22594824" y="6807708"/>
+            <a:ext cx="7223760" cy="1417320"/>
           </a:xfrm>
           <a:prstGeom prst="roundRect">
             <a:avLst>
-              <a:gd name="adj" fmla="val 15625"/>
+              <a:gd name="adj" fmla="val 16129"/>
             </a:avLst>
           </a:prstGeom>
           <a:solidFill>
@@ -1983,8 +1983,8 @@
         </p:nvSpPr>
         <p:spPr>
           <a:xfrm>
-            <a:off x="23097744" y="6876288"/>
-            <a:ext cx="6492240" cy="1463040"/>
+            <a:off x="22823424" y="6807708"/>
+            <a:ext cx="6766560" cy="1417320"/>
           </a:xfrm>
           <a:prstGeom prst="rect">
             <a:avLst/>
@@ -2000,7 +2000,24 @@
               <a:buNone/>
             </a:pPr>
             <a:r>
-              <a:rPr lang="en-US" sz="2300" dirty="0">
+              <a:rPr lang="en-US" sz="2500" b="1" dirty="0">
+                <a:solidFill>
+                  <a:srgbClr val="0F8A6B"/>
+                </a:solidFill>
+                <a:latin typeface="Calibri" pitchFamily="34" charset="0"/>
+                <a:ea typeface="Calibri" pitchFamily="34" charset="-122"/>
+                <a:cs typeface="Calibri" pitchFamily="34" charset="-120"/>
+              </a:rPr>
+              <a:t>Trade creation vs diversion</a:t>
+            </a:r>
+            <a:endParaRPr lang="en-US" sz="2500" dirty="0"/>
+          </a:p>
+          <a:p>
+            <a:pPr algn="l" indent="0" marL="0">
+              <a:buNone/>
+            </a:pPr>
+            <a:r>
+              <a:rPr lang="en-US" sz="2000" dirty="0">
                 <a:solidFill>
                   <a:srgbClr val="1A1F36"/>
                 </a:solidFill>
@@ -2008,26 +2025,9 @@
                 <a:ea typeface="Calibri" pitchFamily="34" charset="-122"/>
                 <a:cs typeface="Calibri" pitchFamily="34" charset="-120"/>
               </a:rPr>
-              <a:t>Mar 2025: US 25% tariff on Mexico,</a:t>
-            </a:r>
-            <a:endParaRPr lang="en-US" sz="2300" dirty="0"/>
-          </a:p>
-          <a:p>
-            <a:pPr algn="l" indent="0" marL="0">
-              <a:buNone/>
-            </a:pPr>
-            <a:r>
-              <a:rPr lang="en-US" sz="2300" dirty="0">
-                <a:solidFill>
-                  <a:srgbClr val="1A1F36"/>
-                </a:solidFill>
-                <a:latin typeface="Calibri" pitchFamily="34" charset="0"/>
-                <a:ea typeface="Calibri" pitchFamily="34" charset="-122"/>
-                <a:cs typeface="Calibri" pitchFamily="34" charset="-120"/>
-              </a:rPr>
-              <a:t>but USMCA goods exempt</a:t>
-            </a:r>
-            <a:endParaRPr lang="en-US" sz="2300" dirty="0"/>
+              <a:t>Mexico plant raised to $800m (Apr 2025), aimed at US exports</a:t>
+            </a:r>
+            <a:endParaRPr lang="en-US" sz="2500" dirty="0"/>
           </a:p>
         </p:txBody>
       </p:sp>
@@ -2040,7 +2040,7 @@
         <p:spPr>
           <a:xfrm>
             <a:off x="22411944" y="5852160"/>
-            <a:ext cx="457200" cy="3511296"/>
+            <a:ext cx="182880" cy="3328416"/>
           </a:xfrm>
           <a:prstGeom prst="line">
             <a:avLst/>
@@ -2062,12 +2062,12 @@
         </p:nvSpPr>
         <p:spPr>
           <a:xfrm>
-            <a:off x="22869144" y="8631936"/>
-            <a:ext cx="6949440" cy="1463040"/>
+            <a:off x="22594824" y="8471916"/>
+            <a:ext cx="7223760" cy="1417320"/>
           </a:xfrm>
           <a:prstGeom prst="roundRect">
             <a:avLst>
-              <a:gd name="adj" fmla="val 15625"/>
+              <a:gd name="adj" fmla="val 16129"/>
             </a:avLst>
           </a:prstGeom>
           <a:solidFill>
@@ -2089,8 +2089,8 @@
         </p:nvSpPr>
         <p:spPr>
           <a:xfrm>
-            <a:off x="23097744" y="8631936"/>
-            <a:ext cx="6492240" cy="1463040"/>
+            <a:off x="22823424" y="8471916"/>
+            <a:ext cx="6766560" cy="1417320"/>
           </a:xfrm>
           <a:prstGeom prst="rect">
             <a:avLst/>
@@ -2106,7 +2106,24 @@
               <a:buNone/>
             </a:pPr>
             <a:r>
-              <a:rPr lang="en-US" sz="2300" dirty="0">
+              <a:rPr lang="en-US" sz="2500" b="1" dirty="0">
+                <a:solidFill>
+                  <a:srgbClr val="0F8A6B"/>
+                </a:solidFill>
+                <a:latin typeface="Calibri" pitchFamily="34" charset="0"/>
+                <a:ea typeface="Calibri" pitchFamily="34" charset="-122"/>
+                <a:cs typeface="Calibri" pitchFamily="34" charset="-120"/>
+              </a:rPr>
+              <a:t>Benefit vs limit</a:t>
+            </a:r>
+            <a:endParaRPr lang="en-US" sz="2500" dirty="0"/>
+          </a:p>
+          <a:p>
+            <a:pPr algn="l" indent="0" marL="0">
+              <a:buNone/>
+            </a:pPr>
+            <a:r>
+              <a:rPr lang="en-US" sz="2000" dirty="0">
                 <a:solidFill>
                   <a:srgbClr val="1A1F36"/>
                 </a:solidFill>
@@ -2114,26 +2131,9 @@
                 <a:ea typeface="Calibri" pitchFamily="34" charset="-122"/>
                 <a:cs typeface="Calibri" pitchFamily="34" charset="-120"/>
               </a:rPr>
-              <a:t>Benefit: tariff-free access to the US,</a:t>
-            </a:r>
-            <a:endParaRPr lang="en-US" sz="2300" dirty="0"/>
-          </a:p>
-          <a:p>
-            <a:pPr algn="l" indent="0" marL="0">
-              <a:buNone/>
-            </a:pPr>
-            <a:r>
-              <a:rPr lang="en-US" sz="2300" dirty="0">
-                <a:solidFill>
-                  <a:srgbClr val="1A1F36"/>
-                </a:solidFill>
-                <a:latin typeface="Calibri" pitchFamily="34" charset="0"/>
-                <a:ea typeface="Calibri" pitchFamily="34" charset="-122"/>
-                <a:cs typeface="Calibri" pitchFamily="34" charset="-120"/>
-              </a:rPr>
-              <a:t>Unilever's biggest market</a:t>
-            </a:r>
-            <a:endParaRPr lang="en-US" sz="2300" dirty="0"/>
+              <a:t>tariff-free access to the US · new US tariffs (Mar 2025)</a:t>
+            </a:r>
+            <a:endParaRPr lang="en-US" sz="2500" dirty="0"/>
           </a:p>
         </p:txBody>
       </p:sp>
@@ -2246,8 +2246,8 @@
         </p:nvSpPr>
         <p:spPr>
           <a:xfrm>
-            <a:off x="7406640" y="12582144"/>
-            <a:ext cx="457200" cy="3511296"/>
+            <a:off x="7680960" y="12765024"/>
+            <a:ext cx="182880" cy="3328416"/>
           </a:xfrm>
           <a:prstGeom prst="line">
             <a:avLst/>
@@ -2269,12 +2269,12 @@
         </p:nvSpPr>
         <p:spPr>
           <a:xfrm>
-            <a:off x="457200" y="11850624"/>
-            <a:ext cx="6949440" cy="1463040"/>
+            <a:off x="457200" y="12056364"/>
+            <a:ext cx="7223760" cy="1417320"/>
           </a:xfrm>
           <a:prstGeom prst="roundRect">
             <a:avLst>
-              <a:gd name="adj" fmla="val 15625"/>
+              <a:gd name="adj" fmla="val 16129"/>
             </a:avLst>
           </a:prstGeom>
           <a:solidFill>
@@ -2296,8 +2296,8 @@
         </p:nvSpPr>
         <p:spPr>
           <a:xfrm>
-            <a:off x="685800" y="11850624"/>
-            <a:ext cx="6492240" cy="1463040"/>
+            <a:off x="685800" y="12056364"/>
+            <a:ext cx="6766560" cy="1417320"/>
           </a:xfrm>
           <a:prstGeom prst="rect">
             <a:avLst/>
@@ -2313,7 +2313,24 @@
               <a:buNone/>
             </a:pPr>
             <a:r>
-              <a:rPr lang="en-US" sz="2300" dirty="0">
+              <a:rPr lang="en-US" sz="2500" b="1" dirty="0">
+                <a:solidFill>
+                  <a:srgbClr val="D9822B"/>
+                </a:solidFill>
+                <a:latin typeface="Calibri" pitchFamily="34" charset="0"/>
+                <a:ea typeface="Calibri" pitchFamily="34" charset="-122"/>
+                <a:cs typeface="Calibri" pitchFamily="34" charset="-120"/>
+              </a:rPr>
+              <a:t>MNE goals vs host-country goals</a:t>
+            </a:r>
+            <a:endParaRPr lang="en-US" sz="2500" dirty="0"/>
+          </a:p>
+          <a:p>
+            <a:pPr algn="l" indent="0" marL="0">
+              <a:buNone/>
+            </a:pPr>
+            <a:r>
+              <a:rPr lang="en-US" sz="2000" dirty="0">
                 <a:solidFill>
                   <a:srgbClr val="1A1F36"/>
                 </a:solidFill>
@@ -2321,26 +2338,9 @@
                 <a:ea typeface="Calibri" pitchFamily="34" charset="-122"/>
                 <a:cs typeface="Calibri" pitchFamily="34" charset="-120"/>
               </a:rPr>
-              <a:t>7 MNE goals vs 7 host-country goals</a:t>
-            </a:r>
-            <a:endParaRPr lang="en-US" sz="2300" dirty="0"/>
-          </a:p>
-          <a:p>
-            <a:pPr algn="l" indent="0" marL="0">
-              <a:buNone/>
-            </a:pPr>
-            <a:r>
-              <a:rPr lang="en-US" sz="2300" dirty="0">
-                <a:solidFill>
-                  <a:srgbClr val="1A1F36"/>
-                </a:solidFill>
-                <a:latin typeface="Calibri" pitchFamily="34" charset="0"/>
-                <a:ea typeface="Calibri" pitchFamily="34" charset="-122"/>
-                <a:cs typeface="Calibri" pitchFamily="34" charset="-120"/>
-              </a:rPr>
-              <a:t>creeping expropriation</a:t>
-            </a:r>
-            <a:endParaRPr lang="en-US" sz="2300" dirty="0"/>
+              <a:t>returns, sales, costs vs jobs, technology, control</a:t>
+            </a:r>
+            <a:endParaRPr lang="en-US" sz="2500" dirty="0"/>
           </a:p>
         </p:txBody>
       </p:sp>
@@ -2352,8 +2352,8 @@
         </p:nvSpPr>
         <p:spPr>
           <a:xfrm>
-            <a:off x="7406640" y="14337792"/>
-            <a:ext cx="457200" cy="1755648"/>
+            <a:off x="7680960" y="14429232"/>
+            <a:ext cx="182880" cy="1664208"/>
           </a:xfrm>
           <a:prstGeom prst="line">
             <a:avLst/>
@@ -2375,12 +2375,12 @@
         </p:nvSpPr>
         <p:spPr>
           <a:xfrm>
-            <a:off x="457200" y="13606272"/>
-            <a:ext cx="6949440" cy="1463040"/>
+            <a:off x="457200" y="13720572"/>
+            <a:ext cx="7223760" cy="1417320"/>
           </a:xfrm>
           <a:prstGeom prst="roundRect">
             <a:avLst>
-              <a:gd name="adj" fmla="val 15625"/>
+              <a:gd name="adj" fmla="val 16129"/>
             </a:avLst>
           </a:prstGeom>
           <a:solidFill>
@@ -2402,8 +2402,8 @@
         </p:nvSpPr>
         <p:spPr>
           <a:xfrm>
-            <a:off x="685800" y="13606272"/>
-            <a:ext cx="6492240" cy="1463040"/>
+            <a:off x="685800" y="13720572"/>
+            <a:ext cx="6766560" cy="1417320"/>
           </a:xfrm>
           <a:prstGeom prst="rect">
             <a:avLst/>
@@ -2419,7 +2419,24 @@
               <a:buNone/>
             </a:pPr>
             <a:r>
-              <a:rPr lang="en-US" sz="2300" dirty="0">
+              <a:rPr lang="en-US" sz="2500" b="1" dirty="0">
+                <a:solidFill>
+                  <a:srgbClr val="D9822B"/>
+                </a:solidFill>
+                <a:latin typeface="Calibri" pitchFamily="34" charset="0"/>
+                <a:ea typeface="Calibri" pitchFamily="34" charset="-122"/>
+                <a:cs typeface="Calibri" pitchFamily="34" charset="-120"/>
+              </a:rPr>
+              <a:t>Ownership advantages</a:t>
+            </a:r>
+            <a:endParaRPr lang="en-US" sz="2500" dirty="0"/>
+          </a:p>
+          <a:p>
+            <a:pPr algn="l" indent="0" marL="0">
+              <a:buNone/>
+            </a:pPr>
+            <a:r>
+              <a:rPr lang="en-US" sz="2000" dirty="0">
                 <a:solidFill>
                   <a:srgbClr val="1A1F36"/>
                 </a:solidFill>
@@ -2427,26 +2444,9 @@
                 <a:ea typeface="Calibri" pitchFamily="34" charset="-122"/>
                 <a:cs typeface="Calibri" pitchFamily="34" charset="-120"/>
               </a:rPr>
-              <a:t>Ownership advantages: brands</a:t>
-            </a:r>
-            <a:endParaRPr lang="en-US" sz="2300" dirty="0"/>
-          </a:p>
-          <a:p>
-            <a:pPr algn="l" indent="0" marL="0">
-              <a:buNone/>
-            </a:pPr>
-            <a:r>
-              <a:rPr lang="en-US" sz="2300" dirty="0">
-                <a:solidFill>
-                  <a:srgbClr val="1A1F36"/>
-                </a:solidFill>
-                <a:latin typeface="Calibri" pitchFamily="34" charset="0"/>
-                <a:ea typeface="Calibri" pitchFamily="34" charset="-122"/>
-                <a:cs typeface="Calibri" pitchFamily="34" charset="-120"/>
-              </a:rPr>
-              <a:t>R&amp;D €0.8–1.0bn a year</a:t>
-            </a:r>
-            <a:endParaRPr lang="en-US" sz="2300" dirty="0"/>
+              <a:t>global brands, R&amp;D and capital from the UK</a:t>
+            </a:r>
+            <a:endParaRPr lang="en-US" sz="2500" dirty="0"/>
           </a:p>
         </p:txBody>
       </p:sp>
@@ -2458,8 +2458,8 @@
         </p:nvSpPr>
         <p:spPr>
           <a:xfrm>
-            <a:off x="7406640" y="16093440"/>
-            <a:ext cx="457200" cy="9144"/>
+            <a:off x="7680960" y="16093440"/>
+            <a:ext cx="182880" cy="9144"/>
           </a:xfrm>
           <a:prstGeom prst="line">
             <a:avLst/>
@@ -2481,12 +2481,12 @@
         </p:nvSpPr>
         <p:spPr>
           <a:xfrm>
-            <a:off x="457200" y="15361920"/>
-            <a:ext cx="6949440" cy="1463040"/>
+            <a:off x="457200" y="15384780"/>
+            <a:ext cx="7223760" cy="1417320"/>
           </a:xfrm>
           <a:prstGeom prst="roundRect">
             <a:avLst>
-              <a:gd name="adj" fmla="val 15625"/>
+              <a:gd name="adj" fmla="val 16129"/>
             </a:avLst>
           </a:prstGeom>
           <a:solidFill>
@@ -2508,8 +2508,8 @@
         </p:nvSpPr>
         <p:spPr>
           <a:xfrm>
-            <a:off x="685800" y="15361920"/>
-            <a:ext cx="6492240" cy="1463040"/>
+            <a:off x="685800" y="15384780"/>
+            <a:ext cx="6766560" cy="1417320"/>
           </a:xfrm>
           <a:prstGeom prst="rect">
             <a:avLst/>
@@ -2525,7 +2525,24 @@
               <a:buNone/>
             </a:pPr>
             <a:r>
-              <a:rPr lang="en-US" sz="2300" dirty="0">
+              <a:rPr lang="en-US" sz="2500" b="1" dirty="0">
+                <a:solidFill>
+                  <a:srgbClr val="D9822B"/>
+                </a:solidFill>
+                <a:latin typeface="Calibri" pitchFamily="34" charset="0"/>
+                <a:ea typeface="Calibri" pitchFamily="34" charset="-122"/>
+                <a:cs typeface="Calibri" pitchFamily="34" charset="-120"/>
+              </a:rPr>
+              <a:t>Benefits for host countries</a:t>
+            </a:r>
+            <a:endParaRPr lang="en-US" sz="2500" dirty="0"/>
+          </a:p>
+          <a:p>
+            <a:pPr algn="l" indent="0" marL="0">
+              <a:buNone/>
+            </a:pPr>
+            <a:r>
+              <a:rPr lang="en-US" sz="2000" dirty="0">
                 <a:solidFill>
                   <a:srgbClr val="1A1F36"/>
                 </a:solidFill>
@@ -2533,26 +2550,9 @@
                 <a:ea typeface="Calibri" pitchFamily="34" charset="-122"/>
                 <a:cs typeface="Calibri" pitchFamily="34" charset="-120"/>
               </a:rPr>
-              <a:t>India: Hindustan Unilever 61.9%</a:t>
-            </a:r>
-            <a:endParaRPr lang="en-US" sz="2300" dirty="0"/>
-          </a:p>
-          <a:p>
-            <a:pPr algn="l" indent="0" marL="0">
-              <a:buNone/>
-            </a:pPr>
-            <a:r>
-              <a:rPr lang="en-US" sz="2300" dirty="0">
-                <a:solidFill>
-                  <a:srgbClr val="1A1F36"/>
-                </a:solidFill>
-                <a:latin typeface="Calibri" pitchFamily="34" charset="0"/>
-                <a:ea typeface="Calibri" pitchFamily="34" charset="-122"/>
-                <a:cs typeface="Calibri" pitchFamily="34" charset="-120"/>
-              </a:rPr>
-              <a:t>buys Minimalist (Apr 2025)</a:t>
-            </a:r>
-            <a:endParaRPr lang="en-US" sz="2300" dirty="0"/>
+              <a:t>local listings: India, Indonesia, Nigeria</a:t>
+            </a:r>
+            <a:endParaRPr lang="en-US" sz="2500" dirty="0"/>
           </a:p>
         </p:txBody>
       </p:sp>
@@ -2564,8 +2564,8 @@
         </p:nvSpPr>
         <p:spPr>
           <a:xfrm flipV="1">
-            <a:off x="7406640" y="16093440"/>
-            <a:ext cx="457200" cy="1755648"/>
+            <a:off x="7680960" y="16093440"/>
+            <a:ext cx="182880" cy="1664208"/>
           </a:xfrm>
           <a:prstGeom prst="line">
             <a:avLst/>
@@ -2587,12 +2587,12 @@
         </p:nvSpPr>
         <p:spPr>
           <a:xfrm>
-            <a:off x="457200" y="17117568"/>
-            <a:ext cx="6949440" cy="1463040"/>
+            <a:off x="457200" y="17048988"/>
+            <a:ext cx="7223760" cy="1417320"/>
           </a:xfrm>
           <a:prstGeom prst="roundRect">
             <a:avLst>
-              <a:gd name="adj" fmla="val 15625"/>
+              <a:gd name="adj" fmla="val 16129"/>
             </a:avLst>
           </a:prstGeom>
           <a:solidFill>
@@ -2614,8 +2614,8 @@
         </p:nvSpPr>
         <p:spPr>
           <a:xfrm>
-            <a:off x="685800" y="17117568"/>
-            <a:ext cx="6492240" cy="1463040"/>
+            <a:off x="685800" y="17048988"/>
+            <a:ext cx="6766560" cy="1417320"/>
           </a:xfrm>
           <a:prstGeom prst="rect">
             <a:avLst/>
@@ -2631,7 +2631,24 @@
               <a:buNone/>
             </a:pPr>
             <a:r>
-              <a:rPr lang="en-US" sz="2300" dirty="0">
+              <a:rPr lang="en-US" sz="2500" b="1" dirty="0">
+                <a:solidFill>
+                  <a:srgbClr val="D9822B"/>
+                </a:solidFill>
+                <a:latin typeface="Calibri" pitchFamily="34" charset="0"/>
+                <a:ea typeface="Calibri" pitchFamily="34" charset="-122"/>
+                <a:cs typeface="Calibri" pitchFamily="34" charset="-120"/>
+              </a:rPr>
+              <a:t>Goal conflicts</a:t>
+            </a:r>
+            <a:endParaRPr lang="en-US" sz="2500" dirty="0"/>
+          </a:p>
+          <a:p>
+            <a:pPr algn="l" indent="0" marL="0">
+              <a:buNone/>
+            </a:pPr>
+            <a:r>
+              <a:rPr lang="en-US" sz="2000" dirty="0">
                 <a:solidFill>
                   <a:srgbClr val="1A1F36"/>
                 </a:solidFill>
@@ -2639,26 +2656,9 @@
                 <a:ea typeface="Calibri" pitchFamily="34" charset="-122"/>
                 <a:cs typeface="Calibri" pitchFamily="34" charset="-120"/>
               </a:rPr>
-              <a:t>Conflict: 7,500 job cuts (Mar 2024)</a:t>
-            </a:r>
-            <a:endParaRPr lang="en-US" sz="2300" dirty="0"/>
-          </a:p>
-          <a:p>
-            <a:pPr algn="l" indent="0" marL="0">
-              <a:buNone/>
-            </a:pPr>
-            <a:r>
-              <a:rPr lang="en-US" sz="2300" dirty="0">
-                <a:solidFill>
-                  <a:srgbClr val="1A1F36"/>
-                </a:solidFill>
-                <a:latin typeface="Calibri" pitchFamily="34" charset="0"/>
-                <a:ea typeface="Calibri" pitchFamily="34" charset="-122"/>
-                <a:cs typeface="Calibri" pitchFamily="34" charset="-120"/>
-              </a:rPr>
-              <a:t>4,300 gone by Dec 2024</a:t>
-            </a:r>
-            <a:endParaRPr lang="en-US" sz="2300" dirty="0"/>
+              <a:t>job cuts (Mar 2024) · Russia (Mar 2022 – Oct 2024)</a:t>
+            </a:r>
+            <a:endParaRPr lang="en-US" sz="2500" dirty="0"/>
           </a:p>
         </p:txBody>
       </p:sp>
@@ -2670,8 +2670,8 @@
         </p:nvSpPr>
         <p:spPr>
           <a:xfrm flipV="1">
-            <a:off x="7406640" y="16093440"/>
-            <a:ext cx="457200" cy="3511296"/>
+            <a:off x="7680960" y="16093440"/>
+            <a:ext cx="182880" cy="3328416"/>
           </a:xfrm>
           <a:prstGeom prst="line">
             <a:avLst/>
@@ -2693,12 +2693,12 @@
         </p:nvSpPr>
         <p:spPr>
           <a:xfrm>
-            <a:off x="457200" y="18873216"/>
-            <a:ext cx="6949440" cy="1463040"/>
+            <a:off x="457200" y="18713196"/>
+            <a:ext cx="7223760" cy="1417320"/>
           </a:xfrm>
           <a:prstGeom prst="roundRect">
             <a:avLst>
-              <a:gd name="adj" fmla="val 15625"/>
+              <a:gd name="adj" fmla="val 16129"/>
             </a:avLst>
           </a:prstGeom>
           <a:solidFill>
@@ -2720,8 +2720,8 @@
         </p:nvSpPr>
         <p:spPr>
           <a:xfrm>
-            <a:off x="685800" y="18873216"/>
-            <a:ext cx="6492240" cy="1463040"/>
+            <a:off x="685800" y="18713196"/>
+            <a:ext cx="6766560" cy="1417320"/>
           </a:xfrm>
           <a:prstGeom prst="rect">
             <a:avLst/>
@@ -2737,7 +2737,24 @@
               <a:buNone/>
             </a:pPr>
             <a:r>
-              <a:rPr lang="en-US" sz="2300" dirty="0">
+              <a:rPr lang="en-US" sz="2500" b="1" dirty="0">
+                <a:solidFill>
+                  <a:srgbClr val="D9822B"/>
+                </a:solidFill>
+                <a:latin typeface="Calibri" pitchFamily="34" charset="0"/>
+                <a:ea typeface="Calibri" pitchFamily="34" charset="-122"/>
+                <a:cs typeface="Calibri" pitchFamily="34" charset="-120"/>
+              </a:rPr>
+              <a:t>Creeping vs outright expropriation</a:t>
+            </a:r>
+            <a:endParaRPr lang="en-US" sz="2500" dirty="0"/>
+          </a:p>
+          <a:p>
+            <a:pPr algn="l" indent="0" marL="0">
+              <a:buNone/>
+            </a:pPr>
+            <a:r>
+              <a:rPr lang="en-US" sz="2000" dirty="0">
                 <a:solidFill>
                   <a:srgbClr val="1A1F36"/>
                 </a:solidFill>
@@ -2745,26 +2762,9 @@
                 <a:ea typeface="Calibri" pitchFamily="34" charset="-122"/>
                 <a:cs typeface="Calibri" pitchFamily="34" charset="-120"/>
               </a:rPr>
-              <a:t>Russia: stayed from Mar 2022,</a:t>
-            </a:r>
-            <a:endParaRPr lang="en-US" sz="2300" dirty="0"/>
-          </a:p>
-          <a:p>
-            <a:pPr algn="l" indent="0" marL="0">
-              <a:buNone/>
-            </a:pPr>
-            <a:r>
-              <a:rPr lang="en-US" sz="2300" dirty="0">
-                <a:solidFill>
-                  <a:srgbClr val="1A1F36"/>
-                </a:solidFill>
-                <a:latin typeface="Calibri" pitchFamily="34" charset="0"/>
-                <a:ea typeface="Calibri" pitchFamily="34" charset="-122"/>
-                <a:cs typeface="Calibri" pitchFamily="34" charset="-120"/>
-              </a:rPr>
-              <a:t>sold the business Oct 2024</a:t>
-            </a:r>
-            <a:endParaRPr lang="en-US" sz="2300" dirty="0"/>
+              <a:t>new host rules, taxes, ownership demands</a:t>
+            </a:r>
+            <a:endParaRPr lang="en-US" sz="2500" dirty="0"/>
           </a:p>
         </p:txBody>
       </p:sp>
@@ -2894,8 +2894,8 @@
         </p:nvSpPr>
         <p:spPr>
           <a:xfrm flipV="1">
-            <a:off x="22411944" y="12582144"/>
-            <a:ext cx="457200" cy="3511296"/>
+            <a:off x="22411944" y="12765024"/>
+            <a:ext cx="182880" cy="3328416"/>
           </a:xfrm>
           <a:prstGeom prst="line">
             <a:avLst/>
@@ -2917,12 +2917,12 @@
         </p:nvSpPr>
         <p:spPr>
           <a:xfrm>
-            <a:off x="22869144" y="11850624"/>
-            <a:ext cx="6949440" cy="1463040"/>
+            <a:off x="22594824" y="12056364"/>
+            <a:ext cx="7223760" cy="1417320"/>
           </a:xfrm>
           <a:prstGeom prst="roundRect">
             <a:avLst>
-              <a:gd name="adj" fmla="val 15625"/>
+              <a:gd name="adj" fmla="val 16129"/>
             </a:avLst>
           </a:prstGeom>
           <a:solidFill>
@@ -2944,8 +2944,8 @@
         </p:nvSpPr>
         <p:spPr>
           <a:xfrm>
-            <a:off x="23097744" y="11850624"/>
-            <a:ext cx="6492240" cy="1463040"/>
+            <a:off x="22823424" y="12056364"/>
+            <a:ext cx="6766560" cy="1417320"/>
           </a:xfrm>
           <a:prstGeom prst="rect">
             <a:avLst/>
@@ -2961,7 +2961,24 @@
               <a:buNone/>
             </a:pPr>
             <a:r>
-              <a:rPr lang="en-US" sz="2300" dirty="0">
+              <a:rPr lang="en-US" sz="2500" b="1" dirty="0">
+                <a:solidFill>
+                  <a:srgbClr val="7C3AED"/>
+                </a:solidFill>
+                <a:latin typeface="Calibri" pitchFamily="34" charset="0"/>
+                <a:ea typeface="Calibri" pitchFamily="34" charset="-122"/>
+                <a:cs typeface="Calibri" pitchFamily="34" charset="-120"/>
+              </a:rPr>
+              <a:t>OLI model (Dunning)</a:t>
+            </a:r>
+            <a:endParaRPr lang="en-US" sz="2500" dirty="0"/>
+          </a:p>
+          <a:p>
+            <a:pPr algn="l" indent="0" marL="0">
+              <a:buNone/>
+            </a:pPr>
+            <a:r>
+              <a:rPr lang="en-US" sz="2000" dirty="0">
                 <a:solidFill>
                   <a:srgbClr val="1A1F36"/>
                 </a:solidFill>
@@ -2969,26 +2986,9 @@
                 <a:ea typeface="Calibri" pitchFamily="34" charset="-122"/>
                 <a:cs typeface="Calibri" pitchFamily="34" charset="-120"/>
               </a:rPr>
-              <a:t>OLI + 4 motives · US = largest FDI</a:t>
-            </a:r>
-            <a:endParaRPr lang="en-US" sz="2300" dirty="0"/>
-          </a:p>
-          <a:p>
-            <a:pPr algn="l" indent="0" marL="0">
-              <a:buNone/>
-            </a:pPr>
-            <a:r>
-              <a:rPr lang="en-US" sz="2300" dirty="0">
-                <a:solidFill>
-                  <a:srgbClr val="1A1F36"/>
-                </a:solidFill>
-                <a:latin typeface="Calibri" pitchFamily="34" charset="0"/>
-                <a:ea typeface="Calibri" pitchFamily="34" charset="-122"/>
-                <a:cs typeface="Calibri" pitchFamily="34" charset="-120"/>
-              </a:rPr>
-              <a:t>host ($279bn, 2024)</a:t>
-            </a:r>
-            <a:endParaRPr lang="en-US" sz="2300" dirty="0"/>
+              <a:t>Ownership · Location · Internalisation</a:t>
+            </a:r>
+            <a:endParaRPr lang="en-US" sz="2500" dirty="0"/>
           </a:p>
         </p:txBody>
       </p:sp>
@@ -3000,8 +3000,8 @@
         </p:nvSpPr>
         <p:spPr>
           <a:xfrm flipV="1">
-            <a:off x="22411944" y="14337792"/>
-            <a:ext cx="457200" cy="1755648"/>
+            <a:off x="22411944" y="14429232"/>
+            <a:ext cx="182880" cy="1664208"/>
           </a:xfrm>
           <a:prstGeom prst="line">
             <a:avLst/>
@@ -3023,12 +3023,12 @@
         </p:nvSpPr>
         <p:spPr>
           <a:xfrm>
-            <a:off x="22869144" y="13606272"/>
-            <a:ext cx="6949440" cy="1463040"/>
+            <a:off x="22594824" y="13720572"/>
+            <a:ext cx="7223760" cy="1417320"/>
           </a:xfrm>
           <a:prstGeom prst="roundRect">
             <a:avLst>
-              <a:gd name="adj" fmla="val 15625"/>
+              <a:gd name="adj" fmla="val 16129"/>
             </a:avLst>
           </a:prstGeom>
           <a:solidFill>
@@ -3050,8 +3050,8 @@
         </p:nvSpPr>
         <p:spPr>
           <a:xfrm>
-            <a:off x="23097744" y="13606272"/>
-            <a:ext cx="6492240" cy="1463040"/>
+            <a:off x="22823424" y="13720572"/>
+            <a:ext cx="6766560" cy="1417320"/>
           </a:xfrm>
           <a:prstGeom prst="rect">
             <a:avLst/>
@@ -3067,7 +3067,24 @@
               <a:buNone/>
             </a:pPr>
             <a:r>
-              <a:rPr lang="en-US" sz="2300" dirty="0">
+              <a:rPr lang="en-US" sz="2500" b="1" dirty="0">
+                <a:solidFill>
+                  <a:srgbClr val="7C3AED"/>
+                </a:solidFill>
+                <a:latin typeface="Calibri" pitchFamily="34" charset="0"/>
+                <a:ea typeface="Calibri" pitchFamily="34" charset="-122"/>
+                <a:cs typeface="Calibri" pitchFamily="34" charset="-120"/>
+              </a:rPr>
+              <a:t>Four motives</a:t>
+            </a:r>
+            <a:endParaRPr lang="en-US" sz="2500" dirty="0"/>
+          </a:p>
+          <a:p>
+            <a:pPr algn="l" indent="0" marL="0">
+              <a:buNone/>
+            </a:pPr>
+            <a:r>
+              <a:rPr lang="en-US" sz="2000" dirty="0">
                 <a:solidFill>
                   <a:srgbClr val="1A1F36"/>
                 </a:solidFill>
@@ -3075,26 +3092,9 @@
                 <a:ea typeface="Calibri" pitchFamily="34" charset="-122"/>
                 <a:cs typeface="Calibri" pitchFamily="34" charset="-120"/>
               </a:rPr>
-              <a:t>US turnover €9.4bn (2020) → €12.5bn</a:t>
-            </a:r>
-            <a:endParaRPr lang="en-US" sz="2300" dirty="0"/>
-          </a:p>
-          <a:p>
-            <a:pPr algn="l" indent="0" marL="0">
-              <a:buNone/>
-            </a:pPr>
-            <a:r>
-              <a:rPr lang="en-US" sz="2300" dirty="0">
-                <a:solidFill>
-                  <a:srgbClr val="1A1F36"/>
-                </a:solidFill>
-                <a:latin typeface="Calibri" pitchFamily="34" charset="0"/>
-                <a:ea typeface="Calibri" pitchFamily="34" charset="-122"/>
-                <a:cs typeface="Calibri" pitchFamily="34" charset="-120"/>
-              </a:rPr>
-              <a:t>(2024), about 1/5 of the group</a:t>
-            </a:r>
-            <a:endParaRPr lang="en-US" sz="2300" dirty="0"/>
+              <a:t>market · resource · efficiency · strategic asset</a:t>
+            </a:r>
+            <a:endParaRPr lang="en-US" sz="2500" dirty="0"/>
           </a:p>
         </p:txBody>
       </p:sp>
@@ -3107,7 +3107,7 @@
         <p:spPr>
           <a:xfrm>
             <a:off x="22411944" y="16093440"/>
-            <a:ext cx="457200" cy="9144"/>
+            <a:ext cx="182880" cy="9144"/>
           </a:xfrm>
           <a:prstGeom prst="line">
             <a:avLst/>
@@ -3129,12 +3129,12 @@
         </p:nvSpPr>
         <p:spPr>
           <a:xfrm>
-            <a:off x="22869144" y="15361920"/>
-            <a:ext cx="6949440" cy="1463040"/>
+            <a:off x="22594824" y="15384780"/>
+            <a:ext cx="7223760" cy="1417320"/>
           </a:xfrm>
           <a:prstGeom prst="roundRect">
             <a:avLst>
-              <a:gd name="adj" fmla="val 15625"/>
+              <a:gd name="adj" fmla="val 16129"/>
             </a:avLst>
           </a:prstGeom>
           <a:solidFill>
@@ -3156,8 +3156,8 @@
         </p:nvSpPr>
         <p:spPr>
           <a:xfrm>
-            <a:off x="23097744" y="15361920"/>
-            <a:ext cx="6492240" cy="1463040"/>
+            <a:off x="22823424" y="15384780"/>
+            <a:ext cx="6766560" cy="1417320"/>
           </a:xfrm>
           <a:prstGeom prst="rect">
             <a:avLst/>
@@ -3173,7 +3173,24 @@
               <a:buNone/>
             </a:pPr>
             <a:r>
-              <a:rPr lang="en-US" sz="2300" dirty="0">
+              <a:rPr lang="en-US" sz="2500" b="1" dirty="0">
+                <a:solidFill>
+                  <a:srgbClr val="7C3AED"/>
+                </a:solidFill>
+                <a:latin typeface="Calibri" pitchFamily="34" charset="0"/>
+                <a:ea typeface="Calibri" pitchFamily="34" charset="-122"/>
+                <a:cs typeface="Calibri" pitchFamily="34" charset="-120"/>
+              </a:rPr>
+              <a:t>Greenfield vs M&amp;A</a:t>
+            </a:r>
+            <a:endParaRPr lang="en-US" sz="2500" dirty="0"/>
+          </a:p>
+          <a:p>
+            <a:pPr algn="l" indent="0" marL="0">
+              <a:buNone/>
+            </a:pPr>
+            <a:r>
+              <a:rPr lang="en-US" sz="2000" dirty="0">
                 <a:solidFill>
                   <a:srgbClr val="1A1F36"/>
                 </a:solidFill>
@@ -3181,26 +3198,9 @@
                 <a:ea typeface="Calibri" pitchFamily="34" charset="-122"/>
                 <a:cs typeface="Calibri" pitchFamily="34" charset="-120"/>
               </a:rPr>
-              <a:t>M&amp;A: Paula's Choice €1.8bn (Aug 2021)</a:t>
-            </a:r>
-            <a:endParaRPr lang="en-US" sz="2300" dirty="0"/>
-          </a:p>
-          <a:p>
-            <a:pPr algn="l" indent="0" marL="0">
-              <a:buNone/>
-            </a:pPr>
-            <a:r>
-              <a:rPr lang="en-US" sz="2300" dirty="0">
-                <a:solidFill>
-                  <a:srgbClr val="1A1F36"/>
-                </a:solidFill>
-                <a:latin typeface="Calibri" pitchFamily="34" charset="0"/>
-                <a:ea typeface="Calibri" pitchFamily="34" charset="-122"/>
-                <a:cs typeface="Calibri" pitchFamily="34" charset="-120"/>
-              </a:rPr>
-              <a:t>Nutrafol → 80% (Jul 2022)</a:t>
-            </a:r>
-            <a:endParaRPr lang="en-US" sz="2300" dirty="0"/>
+              <a:t>Unilever in the US = mainly M&amp;A</a:t>
+            </a:r>
+            <a:endParaRPr lang="en-US" sz="2500" dirty="0"/>
           </a:p>
         </p:txBody>
       </p:sp>
@@ -3213,7 +3213,7 @@
         <p:spPr>
           <a:xfrm>
             <a:off x="22411944" y="16093440"/>
-            <a:ext cx="457200" cy="1755648"/>
+            <a:ext cx="182880" cy="1664208"/>
           </a:xfrm>
           <a:prstGeom prst="line">
             <a:avLst/>
@@ -3235,12 +3235,12 @@
         </p:nvSpPr>
         <p:spPr>
           <a:xfrm>
-            <a:off x="22869144" y="17117568"/>
-            <a:ext cx="6949440" cy="1463040"/>
+            <a:off x="22594824" y="17048988"/>
+            <a:ext cx="7223760" cy="1417320"/>
           </a:xfrm>
           <a:prstGeom prst="roundRect">
             <a:avLst>
-              <a:gd name="adj" fmla="val 15625"/>
+              <a:gd name="adj" fmla="val 16129"/>
             </a:avLst>
           </a:prstGeom>
           <a:solidFill>
@@ -3262,8 +3262,8 @@
         </p:nvSpPr>
         <p:spPr>
           <a:xfrm>
-            <a:off x="23097744" y="17117568"/>
-            <a:ext cx="6492240" cy="1463040"/>
+            <a:off x="22823424" y="17048988"/>
+            <a:ext cx="6766560" cy="1417320"/>
           </a:xfrm>
           <a:prstGeom prst="rect">
             <a:avLst/>
@@ -3279,7 +3279,24 @@
               <a:buNone/>
             </a:pPr>
             <a:r>
-              <a:rPr lang="en-US" sz="2300" dirty="0">
+              <a:rPr lang="en-US" sz="2500" b="1" dirty="0">
+                <a:solidFill>
+                  <a:srgbClr val="7C3AED"/>
+                </a:solidFill>
+                <a:latin typeface="Calibri" pitchFamily="34" charset="0"/>
+                <a:ea typeface="Calibri" pitchFamily="34" charset="-122"/>
+                <a:cs typeface="Calibri" pitchFamily="34" charset="-120"/>
+              </a:rPr>
+              <a:t>Strategic asset-seeking</a:t>
+            </a:r>
+            <a:endParaRPr lang="en-US" sz="2500" dirty="0"/>
+          </a:p>
+          <a:p>
+            <a:pPr algn="l" indent="0" marL="0">
+              <a:buNone/>
+            </a:pPr>
+            <a:r>
+              <a:rPr lang="en-US" sz="2000" dirty="0">
                 <a:solidFill>
                   <a:srgbClr val="1A1F36"/>
                 </a:solidFill>
@@ -3287,16 +3304,16 @@
                 <a:ea typeface="Calibri" pitchFamily="34" charset="-122"/>
                 <a:cs typeface="Calibri" pitchFamily="34" charset="-120"/>
               </a:rPr>
-              <a:t>K18 (Feb 2024)</a:t>
-            </a:r>
-            <a:endParaRPr lang="en-US" sz="2300" dirty="0"/>
-          </a:p>
-          <a:p>
-            <a:pPr algn="l" indent="0" marL="0">
-              <a:buNone/>
-            </a:pPr>
-            <a:r>
-              <a:rPr lang="en-US" sz="2300" dirty="0">
+              <a:t>Paula's Choice (Aug 2021) · Nutrafol (Jul 2022)</a:t>
+            </a:r>
+            <a:endParaRPr lang="en-US" sz="2500" dirty="0"/>
+          </a:p>
+          <a:p>
+            <a:pPr algn="l" indent="0" marL="0">
+              <a:buNone/>
+            </a:pPr>
+            <a:r>
+              <a:rPr lang="en-US" sz="2000" dirty="0">
                 <a:solidFill>
                   <a:srgbClr val="1A1F36"/>
                 </a:solidFill>
@@ -3304,9 +3321,9 @@
                 <a:ea typeface="Calibri" pitchFamily="34" charset="-122"/>
                 <a:cs typeface="Calibri" pitchFamily="34" charset="-120"/>
               </a:rPr>
-              <a:t>Dr. Squatch €1.2bn (Sep 2025)</a:t>
-            </a:r>
-            <a:endParaRPr lang="en-US" sz="2300" dirty="0"/>
+              <a:t>K18 (Feb 2024) · Dr. Squatch (Sep 2025)</a:t>
+            </a:r>
+            <a:endParaRPr lang="en-US" sz="2500" dirty="0"/>
           </a:p>
         </p:txBody>
       </p:sp>
@@ -3319,7 +3336,7 @@
         <p:spPr>
           <a:xfrm>
             <a:off x="22411944" y="16093440"/>
-            <a:ext cx="457200" cy="3511296"/>
+            <a:ext cx="182880" cy="3328416"/>
           </a:xfrm>
           <a:prstGeom prst="line">
             <a:avLst/>
@@ -3341,12 +3358,12 @@
         </p:nvSpPr>
         <p:spPr>
           <a:xfrm>
-            <a:off x="22869144" y="18873216"/>
-            <a:ext cx="6949440" cy="1463040"/>
+            <a:off x="22594824" y="18713196"/>
+            <a:ext cx="7223760" cy="1417320"/>
           </a:xfrm>
           <a:prstGeom prst="roundRect">
             <a:avLst>
-              <a:gd name="adj" fmla="val 15625"/>
+              <a:gd name="adj" fmla="val 16129"/>
             </a:avLst>
           </a:prstGeom>
           <a:solidFill>
@@ -3368,8 +3385,8 @@
         </p:nvSpPr>
         <p:spPr>
           <a:xfrm>
-            <a:off x="23097744" y="18873216"/>
-            <a:ext cx="6492240" cy="1463040"/>
+            <a:off x="22823424" y="18713196"/>
+            <a:ext cx="6766560" cy="1417320"/>
           </a:xfrm>
           <a:prstGeom prst="rect">
             <a:avLst/>
@@ -3385,7 +3402,24 @@
               <a:buNone/>
             </a:pPr>
             <a:r>
-              <a:rPr lang="en-US" sz="2300" dirty="0">
+              <a:rPr lang="en-US" sz="2500" b="1" dirty="0">
+                <a:solidFill>
+                  <a:srgbClr val="7C3AED"/>
+                </a:solidFill>
+                <a:latin typeface="Calibri" pitchFamily="34" charset="0"/>
+                <a:ea typeface="Calibri" pitchFamily="34" charset="-122"/>
+                <a:cs typeface="Calibri" pitchFamily="34" charset="-120"/>
+              </a:rPr>
+              <a:t>Benefit for Unilever</a:t>
+            </a:r>
+            <a:endParaRPr lang="en-US" sz="2500" dirty="0"/>
+          </a:p>
+          <a:p>
+            <a:pPr algn="l" indent="0" marL="0">
+              <a:buNone/>
+            </a:pPr>
+            <a:r>
+              <a:rPr lang="en-US" sz="2000" dirty="0">
                 <a:solidFill>
                   <a:srgbClr val="1A1F36"/>
                 </a:solidFill>
@@ -3393,26 +3427,9 @@
                 <a:ea typeface="Calibri" pitchFamily="34" charset="-122"/>
                 <a:cs typeface="Calibri" pitchFamily="34" charset="-120"/>
               </a:rPr>
-              <a:t>Benefit: 70% of US Beauty &amp; Wellbeing</a:t>
-            </a:r>
-            <a:endParaRPr lang="en-US" sz="2300" dirty="0"/>
-          </a:p>
-          <a:p>
-            <a:pPr algn="l" indent="0" marL="0">
-              <a:buNone/>
-            </a:pPr>
-            <a:r>
-              <a:rPr lang="en-US" sz="2300" dirty="0">
-                <a:solidFill>
-                  <a:srgbClr val="1A1F36"/>
-                </a:solidFill>
-                <a:latin typeface="Calibri" pitchFamily="34" charset="0"/>
-                <a:ea typeface="Calibri" pitchFamily="34" charset="-122"/>
-                <a:cs typeface="Calibri" pitchFamily="34" charset="-120"/>
-              </a:rPr>
-              <a:t>sales from premium brands (2024)</a:t>
-            </a:r>
-            <a:endParaRPr lang="en-US" sz="2300" dirty="0"/>
+              <a:t>premium brands, online skills, growth in the US</a:t>
+            </a:r>
+            <a:endParaRPr lang="en-US" sz="2500" dirty="0"/>
           </a:p>
         </p:txBody>
       </p:sp>
@@ -3586,7 +3603,7 @@
                 <a:ea typeface="Calibri" pitchFamily="34" charset="-122"/>
                 <a:cs typeface="Calibri" pitchFamily="34" charset="-120"/>
               </a:rPr>
-              <a:t>Turnover €50.5bn (2025)</a:t>
+              <a:t>Four theories · 2020–2025</a:t>
             </a:r>
             <a:endParaRPr lang="en-US" sz="5400" dirty="0"/>
           </a:p>

--- a/content/busi1763/files/Unilever_MindMap_A1.pptx
+++ b/content/busi1763/files/Unilever_MindMap_A1.pptx
@@ -984,8 +984,8 @@
         </p:nvSpPr>
         <p:spPr>
           <a:xfrm>
-            <a:off x="7680960" y="2523744"/>
-            <a:ext cx="182880" cy="3328416"/>
+            <a:off x="7680960" y="2834640"/>
+            <a:ext cx="182880" cy="3017520"/>
           </a:xfrm>
           <a:prstGeom prst="line">
             <a:avLst/>
@@ -1007,12 +1007,12 @@
         </p:nvSpPr>
         <p:spPr>
           <a:xfrm>
-            <a:off x="457200" y="1815084"/>
-            <a:ext cx="7223760" cy="1417320"/>
+            <a:off x="457200" y="2171700"/>
+            <a:ext cx="7223760" cy="1325880"/>
           </a:xfrm>
           <a:prstGeom prst="roundRect">
             <a:avLst>
-              <a:gd name="adj" fmla="val 16129"/>
+              <a:gd name="adj" fmla="val 17241"/>
             </a:avLst>
           </a:prstGeom>
           <a:solidFill>
@@ -1034,8 +1034,8 @@
         </p:nvSpPr>
         <p:spPr>
           <a:xfrm>
-            <a:off x="685800" y="1815084"/>
-            <a:ext cx="6766560" cy="1417320"/>
+            <a:off x="685800" y="2171700"/>
+            <a:ext cx="6766560" cy="1325880"/>
           </a:xfrm>
           <a:prstGeom prst="rect">
             <a:avLst/>
@@ -1090,8 +1090,8 @@
         </p:nvSpPr>
         <p:spPr>
           <a:xfrm>
-            <a:off x="7680960" y="4187952"/>
-            <a:ext cx="182880" cy="1664208"/>
+            <a:off x="7680960" y="4343400"/>
+            <a:ext cx="182880" cy="1508760"/>
           </a:xfrm>
           <a:prstGeom prst="line">
             <a:avLst/>
@@ -1113,12 +1113,12 @@
         </p:nvSpPr>
         <p:spPr>
           <a:xfrm>
-            <a:off x="457200" y="3479292"/>
-            <a:ext cx="7223760" cy="1417320"/>
+            <a:off x="457200" y="3680460"/>
+            <a:ext cx="7223760" cy="1325880"/>
           </a:xfrm>
           <a:prstGeom prst="roundRect">
             <a:avLst>
-              <a:gd name="adj" fmla="val 16129"/>
+              <a:gd name="adj" fmla="val 17241"/>
             </a:avLst>
           </a:prstGeom>
           <a:solidFill>
@@ -1140,8 +1140,8 @@
         </p:nvSpPr>
         <p:spPr>
           <a:xfrm>
-            <a:off x="685800" y="3479292"/>
-            <a:ext cx="6766560" cy="1417320"/>
+            <a:off x="685800" y="3680460"/>
+            <a:ext cx="6766560" cy="1325880"/>
           </a:xfrm>
           <a:prstGeom prst="rect">
             <a:avLst/>
@@ -1219,12 +1219,12 @@
         </p:nvSpPr>
         <p:spPr>
           <a:xfrm>
-            <a:off x="457200" y="5143500"/>
-            <a:ext cx="7223760" cy="1417320"/>
+            <a:off x="457200" y="5189220"/>
+            <a:ext cx="7223760" cy="1325880"/>
           </a:xfrm>
           <a:prstGeom prst="roundRect">
             <a:avLst>
-              <a:gd name="adj" fmla="val 16129"/>
+              <a:gd name="adj" fmla="val 17241"/>
             </a:avLst>
           </a:prstGeom>
           <a:solidFill>
@@ -1246,8 +1246,8 @@
         </p:nvSpPr>
         <p:spPr>
           <a:xfrm>
-            <a:off x="685800" y="5143500"/>
-            <a:ext cx="6766560" cy="1417320"/>
+            <a:off x="685800" y="5189220"/>
+            <a:ext cx="6766560" cy="1325880"/>
           </a:xfrm>
           <a:prstGeom prst="rect">
             <a:avLst/>
@@ -1303,7 +1303,7 @@
         <p:spPr>
           <a:xfrm flipV="1">
             <a:off x="7680960" y="5852160"/>
-            <a:ext cx="182880" cy="1664208"/>
+            <a:ext cx="182880" cy="1508760"/>
           </a:xfrm>
           <a:prstGeom prst="line">
             <a:avLst/>
@@ -1325,12 +1325,12 @@
         </p:nvSpPr>
         <p:spPr>
           <a:xfrm>
-            <a:off x="457200" y="6807708"/>
-            <a:ext cx="7223760" cy="1417320"/>
+            <a:off x="457200" y="6697980"/>
+            <a:ext cx="7223760" cy="1325880"/>
           </a:xfrm>
           <a:prstGeom prst="roundRect">
             <a:avLst>
-              <a:gd name="adj" fmla="val 16129"/>
+              <a:gd name="adj" fmla="val 17241"/>
             </a:avLst>
           </a:prstGeom>
           <a:solidFill>
@@ -1352,8 +1352,8 @@
         </p:nvSpPr>
         <p:spPr>
           <a:xfrm>
-            <a:off x="685800" y="6807708"/>
-            <a:ext cx="6766560" cy="1417320"/>
+            <a:off x="685800" y="6697980"/>
+            <a:ext cx="6766560" cy="1325880"/>
           </a:xfrm>
           <a:prstGeom prst="rect">
             <a:avLst/>
@@ -1409,7 +1409,7 @@
         <p:spPr>
           <a:xfrm flipV="1">
             <a:off x="7680960" y="5852160"/>
-            <a:ext cx="182880" cy="3328416"/>
+            <a:ext cx="182880" cy="3017520"/>
           </a:xfrm>
           <a:prstGeom prst="line">
             <a:avLst/>
@@ -1431,12 +1431,12 @@
         </p:nvSpPr>
         <p:spPr>
           <a:xfrm>
-            <a:off x="457200" y="8471916"/>
-            <a:ext cx="7223760" cy="1417320"/>
+            <a:off x="457200" y="8206740"/>
+            <a:ext cx="7223760" cy="1325880"/>
           </a:xfrm>
           <a:prstGeom prst="roundRect">
             <a:avLst>
-              <a:gd name="adj" fmla="val 16129"/>
+              <a:gd name="adj" fmla="val 17241"/>
             </a:avLst>
           </a:prstGeom>
           <a:solidFill>
@@ -1458,8 +1458,8 @@
         </p:nvSpPr>
         <p:spPr>
           <a:xfrm>
-            <a:off x="685800" y="8471916"/>
-            <a:ext cx="6766560" cy="1417320"/>
+            <a:off x="685800" y="8206740"/>
+            <a:ext cx="6766560" cy="1325880"/>
           </a:xfrm>
           <a:prstGeom prst="rect">
             <a:avLst/>
@@ -1615,8 +1615,8 @@
         </p:nvSpPr>
         <p:spPr>
           <a:xfrm flipV="1">
-            <a:off x="22411944" y="2523744"/>
-            <a:ext cx="182880" cy="3328416"/>
+            <a:off x="22411944" y="2834640"/>
+            <a:ext cx="182880" cy="3017520"/>
           </a:xfrm>
           <a:prstGeom prst="line">
             <a:avLst/>
@@ -1638,12 +1638,12 @@
         </p:nvSpPr>
         <p:spPr>
           <a:xfrm>
-            <a:off x="22594824" y="1815084"/>
-            <a:ext cx="7223760" cy="1417320"/>
+            <a:off x="22594824" y="2171700"/>
+            <a:ext cx="7223760" cy="1325880"/>
           </a:xfrm>
           <a:prstGeom prst="roundRect">
             <a:avLst>
-              <a:gd name="adj" fmla="val 16129"/>
+              <a:gd name="adj" fmla="val 17241"/>
             </a:avLst>
           </a:prstGeom>
           <a:solidFill>
@@ -1665,8 +1665,8 @@
         </p:nvSpPr>
         <p:spPr>
           <a:xfrm>
-            <a:off x="22823424" y="1815084"/>
-            <a:ext cx="6766560" cy="1417320"/>
+            <a:off x="22823424" y="2171700"/>
+            <a:ext cx="6766560" cy="1325880"/>
           </a:xfrm>
           <a:prstGeom prst="rect">
             <a:avLst/>
@@ -1721,8 +1721,8 @@
         </p:nvSpPr>
         <p:spPr>
           <a:xfrm flipV="1">
-            <a:off x="22411944" y="4187952"/>
-            <a:ext cx="182880" cy="1664208"/>
+            <a:off x="22411944" y="4343400"/>
+            <a:ext cx="182880" cy="1508760"/>
           </a:xfrm>
           <a:prstGeom prst="line">
             <a:avLst/>
@@ -1744,12 +1744,12 @@
         </p:nvSpPr>
         <p:spPr>
           <a:xfrm>
-            <a:off x="22594824" y="3479292"/>
-            <a:ext cx="7223760" cy="1417320"/>
+            <a:off x="22594824" y="3680460"/>
+            <a:ext cx="7223760" cy="1325880"/>
           </a:xfrm>
           <a:prstGeom prst="roundRect">
             <a:avLst>
-              <a:gd name="adj" fmla="val 16129"/>
+              <a:gd name="adj" fmla="val 17241"/>
             </a:avLst>
           </a:prstGeom>
           <a:solidFill>
@@ -1771,8 +1771,8 @@
         </p:nvSpPr>
         <p:spPr>
           <a:xfrm>
-            <a:off x="22823424" y="3479292"/>
-            <a:ext cx="6766560" cy="1417320"/>
+            <a:off x="22823424" y="3680460"/>
+            <a:ext cx="6766560" cy="1325880"/>
           </a:xfrm>
           <a:prstGeom prst="rect">
             <a:avLst/>
@@ -1826,7 +1826,7 @@
           <p:nvPr/>
         </p:nvSpPr>
         <p:spPr>
-          <a:xfrm>
+          <a:xfrm flipV="1">
             <a:off x="22411944" y="5852160"/>
             <a:ext cx="182880" cy="9144"/>
           </a:xfrm>
@@ -1850,12 +1850,12 @@
         </p:nvSpPr>
         <p:spPr>
           <a:xfrm>
-            <a:off x="22594824" y="5143500"/>
-            <a:ext cx="7223760" cy="1417320"/>
+            <a:off x="22594824" y="5189220"/>
+            <a:ext cx="7223760" cy="1325880"/>
           </a:xfrm>
           <a:prstGeom prst="roundRect">
             <a:avLst>
-              <a:gd name="adj" fmla="val 16129"/>
+              <a:gd name="adj" fmla="val 17241"/>
             </a:avLst>
           </a:prstGeom>
           <a:solidFill>
@@ -1877,8 +1877,8 @@
         </p:nvSpPr>
         <p:spPr>
           <a:xfrm>
-            <a:off x="22823424" y="5143500"/>
-            <a:ext cx="6766560" cy="1417320"/>
+            <a:off x="22823424" y="5189220"/>
+            <a:ext cx="6766560" cy="1325880"/>
           </a:xfrm>
           <a:prstGeom prst="rect">
             <a:avLst/>
@@ -1934,7 +1934,7 @@
         <p:spPr>
           <a:xfrm>
             <a:off x="22411944" y="5852160"/>
-            <a:ext cx="182880" cy="1664208"/>
+            <a:ext cx="182880" cy="1508760"/>
           </a:xfrm>
           <a:prstGeom prst="line">
             <a:avLst/>
@@ -1956,12 +1956,12 @@
         </p:nvSpPr>
         <p:spPr>
           <a:xfrm>
-            <a:off x="22594824" y="6807708"/>
-            <a:ext cx="7223760" cy="1417320"/>
+            <a:off x="22594824" y="6697980"/>
+            <a:ext cx="7223760" cy="1325880"/>
           </a:xfrm>
           <a:prstGeom prst="roundRect">
             <a:avLst>
-              <a:gd name="adj" fmla="val 16129"/>
+              <a:gd name="adj" fmla="val 17241"/>
             </a:avLst>
           </a:prstGeom>
           <a:solidFill>
@@ -1983,8 +1983,8 @@
         </p:nvSpPr>
         <p:spPr>
           <a:xfrm>
-            <a:off x="22823424" y="6807708"/>
-            <a:ext cx="6766560" cy="1417320"/>
+            <a:off x="22823424" y="6697980"/>
+            <a:ext cx="6766560" cy="1325880"/>
           </a:xfrm>
           <a:prstGeom prst="rect">
             <a:avLst/>
@@ -2040,7 +2040,7 @@
         <p:spPr>
           <a:xfrm>
             <a:off x="22411944" y="5852160"/>
-            <a:ext cx="182880" cy="3328416"/>
+            <a:ext cx="182880" cy="3017520"/>
           </a:xfrm>
           <a:prstGeom prst="line">
             <a:avLst/>
@@ -2062,12 +2062,12 @@
         </p:nvSpPr>
         <p:spPr>
           <a:xfrm>
-            <a:off x="22594824" y="8471916"/>
-            <a:ext cx="7223760" cy="1417320"/>
+            <a:off x="22594824" y="8206740"/>
+            <a:ext cx="7223760" cy="1325880"/>
           </a:xfrm>
           <a:prstGeom prst="roundRect">
             <a:avLst>
-              <a:gd name="adj" fmla="val 16129"/>
+              <a:gd name="adj" fmla="val 17241"/>
             </a:avLst>
           </a:prstGeom>
           <a:solidFill>
@@ -2089,8 +2089,8 @@
         </p:nvSpPr>
         <p:spPr>
           <a:xfrm>
-            <a:off x="22823424" y="8471916"/>
-            <a:ext cx="6766560" cy="1417320"/>
+            <a:off x="22823424" y="8206740"/>
+            <a:ext cx="6766560" cy="1325880"/>
           </a:xfrm>
           <a:prstGeom prst="rect">
             <a:avLst/>
@@ -2224,7 +2224,7 @@
         <p:spPr>
           <a:xfrm flipV="1">
             <a:off x="10881360" y="10972800"/>
-            <a:ext cx="4256532" cy="5120640"/>
+            <a:ext cx="4256532" cy="4892040"/>
           </a:xfrm>
           <a:prstGeom prst="line">
             <a:avLst/>
@@ -2246,8 +2246,8 @@
         </p:nvSpPr>
         <p:spPr>
           <a:xfrm>
-            <a:off x="7680960" y="12765024"/>
-            <a:ext cx="182880" cy="3328416"/>
+            <a:off x="7680960" y="12092940"/>
+            <a:ext cx="182880" cy="3771900"/>
           </a:xfrm>
           <a:prstGeom prst="line">
             <a:avLst/>
@@ -2269,12 +2269,12 @@
         </p:nvSpPr>
         <p:spPr>
           <a:xfrm>
-            <a:off x="457200" y="12056364"/>
-            <a:ext cx="7223760" cy="1417320"/>
+            <a:off x="457200" y="11430000"/>
+            <a:ext cx="7223760" cy="1325880"/>
           </a:xfrm>
           <a:prstGeom prst="roundRect">
             <a:avLst>
-              <a:gd name="adj" fmla="val 16129"/>
+              <a:gd name="adj" fmla="val 17241"/>
             </a:avLst>
           </a:prstGeom>
           <a:solidFill>
@@ -2296,8 +2296,8 @@
         </p:nvSpPr>
         <p:spPr>
           <a:xfrm>
-            <a:off x="685800" y="12056364"/>
-            <a:ext cx="6766560" cy="1417320"/>
+            <a:off x="685800" y="11430000"/>
+            <a:ext cx="6766560" cy="1325880"/>
           </a:xfrm>
           <a:prstGeom prst="rect">
             <a:avLst/>
@@ -2338,7 +2338,7 @@
                 <a:ea typeface="Calibri" pitchFamily="34" charset="-122"/>
                 <a:cs typeface="Calibri" pitchFamily="34" charset="-120"/>
               </a:rPr>
-              <a:t>returns, sales, costs vs jobs, technology, control</a:t>
+              <a:t>returns, costs vs jobs, control, clean environment</a:t>
             </a:r>
             <a:endParaRPr lang="en-US" sz="2500" dirty="0"/>
           </a:p>
@@ -2352,8 +2352,8 @@
         </p:nvSpPr>
         <p:spPr>
           <a:xfrm>
-            <a:off x="7680960" y="14429232"/>
-            <a:ext cx="182880" cy="1664208"/>
+            <a:off x="7680960" y="13601700"/>
+            <a:ext cx="182880" cy="2263140"/>
           </a:xfrm>
           <a:prstGeom prst="line">
             <a:avLst/>
@@ -2375,12 +2375,12 @@
         </p:nvSpPr>
         <p:spPr>
           <a:xfrm>
-            <a:off x="457200" y="13720572"/>
-            <a:ext cx="7223760" cy="1417320"/>
+            <a:off x="457200" y="12938760"/>
+            <a:ext cx="7223760" cy="1325880"/>
           </a:xfrm>
           <a:prstGeom prst="roundRect">
             <a:avLst>
-              <a:gd name="adj" fmla="val 16129"/>
+              <a:gd name="adj" fmla="val 17241"/>
             </a:avLst>
           </a:prstGeom>
           <a:solidFill>
@@ -2402,8 +2402,8 @@
         </p:nvSpPr>
         <p:spPr>
           <a:xfrm>
-            <a:off x="685800" y="13720572"/>
-            <a:ext cx="6766560" cy="1417320"/>
+            <a:off x="685800" y="12938760"/>
+            <a:ext cx="6766560" cy="1325880"/>
           </a:xfrm>
           <a:prstGeom prst="rect">
             <a:avLst/>
@@ -2444,7 +2444,7 @@
                 <a:ea typeface="Calibri" pitchFamily="34" charset="-122"/>
                 <a:cs typeface="Calibri" pitchFamily="34" charset="-120"/>
               </a:rPr>
-              <a:t>global brands, R&amp;D and capital from the UK</a:t>
+              <a:t>UK brands and R&amp;D · hosts gain local listings (e.g. India)</a:t>
             </a:r>
             <a:endParaRPr lang="en-US" sz="2500" dirty="0"/>
           </a:p>
@@ -2458,8 +2458,8 @@
         </p:nvSpPr>
         <p:spPr>
           <a:xfrm>
-            <a:off x="7680960" y="16093440"/>
-            <a:ext cx="182880" cy="9144"/>
+            <a:off x="7680960" y="15110460"/>
+            <a:ext cx="182880" cy="754380"/>
           </a:xfrm>
           <a:prstGeom prst="line">
             <a:avLst/>
@@ -2481,12 +2481,12 @@
         </p:nvSpPr>
         <p:spPr>
           <a:xfrm>
-            <a:off x="457200" y="15384780"/>
-            <a:ext cx="7223760" cy="1417320"/>
+            <a:off x="457200" y="14447520"/>
+            <a:ext cx="7223760" cy="1325880"/>
           </a:xfrm>
           <a:prstGeom prst="roundRect">
             <a:avLst>
-              <a:gd name="adj" fmla="val 16129"/>
+              <a:gd name="adj" fmla="val 17241"/>
             </a:avLst>
           </a:prstGeom>
           <a:solidFill>
@@ -2508,8 +2508,8 @@
         </p:nvSpPr>
         <p:spPr>
           <a:xfrm>
-            <a:off x="685800" y="15384780"/>
-            <a:ext cx="6766560" cy="1417320"/>
+            <a:off x="685800" y="14447520"/>
+            <a:ext cx="6766560" cy="1325880"/>
           </a:xfrm>
           <a:prstGeom prst="rect">
             <a:avLst/>
@@ -2533,7 +2533,7 @@
                 <a:ea typeface="Calibri" pitchFamily="34" charset="-122"/>
                 <a:cs typeface="Calibri" pitchFamily="34" charset="-120"/>
               </a:rPr>
-              <a:t>Benefits for host countries</a:t>
+              <a:t>Goal conflicts</a:t>
             </a:r>
             <a:endParaRPr lang="en-US" sz="2500" dirty="0"/>
           </a:p>
@@ -2550,7 +2550,7 @@
                 <a:ea typeface="Calibri" pitchFamily="34" charset="-122"/>
                 <a:cs typeface="Calibri" pitchFamily="34" charset="-120"/>
               </a:rPr>
-              <a:t>local listings: India, Indonesia, Nigeria</a:t>
+              <a:t>job cuts (Mar 2024) · Russia (Mar 2022 – Oct 2024)</a:t>
             </a:r>
             <a:endParaRPr lang="en-US" sz="2500" dirty="0"/>
           </a:p>
@@ -2564,8 +2564,8 @@
         </p:nvSpPr>
         <p:spPr>
           <a:xfrm flipV="1">
-            <a:off x="7680960" y="16093440"/>
-            <a:ext cx="182880" cy="1664208"/>
+            <a:off x="7680960" y="15864840"/>
+            <a:ext cx="182880" cy="754380"/>
           </a:xfrm>
           <a:prstGeom prst="line">
             <a:avLst/>
@@ -2587,12 +2587,12 @@
         </p:nvSpPr>
         <p:spPr>
           <a:xfrm>
-            <a:off x="457200" y="17048988"/>
-            <a:ext cx="7223760" cy="1417320"/>
+            <a:off x="457200" y="15956280"/>
+            <a:ext cx="7223760" cy="1325880"/>
           </a:xfrm>
           <a:prstGeom prst="roundRect">
             <a:avLst>
-              <a:gd name="adj" fmla="val 16129"/>
+              <a:gd name="adj" fmla="val 17241"/>
             </a:avLst>
           </a:prstGeom>
           <a:solidFill>
@@ -2614,8 +2614,8 @@
         </p:nvSpPr>
         <p:spPr>
           <a:xfrm>
-            <a:off x="685800" y="17048988"/>
-            <a:ext cx="6766560" cy="1417320"/>
+            <a:off x="685800" y="15956280"/>
+            <a:ext cx="6766560" cy="1325880"/>
           </a:xfrm>
           <a:prstGeom prst="rect">
             <a:avLst/>
@@ -2639,7 +2639,7 @@
                 <a:ea typeface="Calibri" pitchFamily="34" charset="-122"/>
                 <a:cs typeface="Calibri" pitchFamily="34" charset="-120"/>
               </a:rPr>
-              <a:t>Goal conflicts</a:t>
+              <a:t>CSR = licence to operate</a:t>
             </a:r>
             <a:endParaRPr lang="en-US" sz="2500" dirty="0"/>
           </a:p>
@@ -2656,7 +2656,7 @@
                 <a:ea typeface="Calibri" pitchFamily="34" charset="-122"/>
                 <a:cs typeface="Calibri" pitchFamily="34" charset="-120"/>
               </a:rPr>
-              <a:t>job cuts (Mar 2024) · Russia (Mar 2022 – Oct 2024)</a:t>
+              <a:t>framework: Unilever Compass (from Mar 2021)</a:t>
             </a:r>
             <a:endParaRPr lang="en-US" sz="2500" dirty="0"/>
           </a:p>
@@ -2670,8 +2670,8 @@
         </p:nvSpPr>
         <p:spPr>
           <a:xfrm flipV="1">
-            <a:off x="7680960" y="16093440"/>
-            <a:ext cx="182880" cy="3328416"/>
+            <a:off x="7680960" y="15864840"/>
+            <a:ext cx="182880" cy="2263140"/>
           </a:xfrm>
           <a:prstGeom prst="line">
             <a:avLst/>
@@ -2693,12 +2693,12 @@
         </p:nvSpPr>
         <p:spPr>
           <a:xfrm>
-            <a:off x="457200" y="18713196"/>
-            <a:ext cx="7223760" cy="1417320"/>
+            <a:off x="457200" y="17465040"/>
+            <a:ext cx="7223760" cy="1325880"/>
           </a:xfrm>
           <a:prstGeom prst="roundRect">
             <a:avLst>
-              <a:gd name="adj" fmla="val 16129"/>
+              <a:gd name="adj" fmla="val 17241"/>
             </a:avLst>
           </a:prstGeom>
           <a:solidFill>
@@ -2720,8 +2720,8 @@
         </p:nvSpPr>
         <p:spPr>
           <a:xfrm>
-            <a:off x="685800" y="18713196"/>
-            <a:ext cx="6766560" cy="1417320"/>
+            <a:off x="685800" y="17465040"/>
+            <a:ext cx="6766560" cy="1325880"/>
           </a:xfrm>
           <a:prstGeom prst="rect">
             <a:avLst/>
@@ -2745,7 +2745,7 @@
                 <a:ea typeface="Calibri" pitchFamily="34" charset="-122"/>
                 <a:cs typeface="Calibri" pitchFamily="34" charset="-120"/>
               </a:rPr>
-              <a:t>Creeping vs outright expropriation</a:t>
+              <a:t>CSR: progress vs setbacks</a:t>
             </a:r>
             <a:endParaRPr lang="en-US" sz="2500" dirty="0"/>
           </a:p>
@@ -2762,7 +2762,7 @@
                 <a:ea typeface="Calibri" pitchFamily="34" charset="-122"/>
                 <a:cs typeface="Calibri" pitchFamily="34" charset="-120"/>
               </a:rPr>
-              <a:t>new host rules, taxes, ownership demands</a:t>
+              <a:t>own emissions −77% (by Dec 2025) · plastic target cut (Apr 2024) · greenwashing claims</a:t>
             </a:r>
             <a:endParaRPr lang="en-US" sz="2500" dirty="0"/>
           </a:p>
@@ -2775,8 +2775,114 @@
           <p:nvPr/>
         </p:nvSpPr>
         <p:spPr>
-          <a:xfrm>
-            <a:off x="7863840" y="15224760"/>
+          <a:xfrm flipV="1">
+            <a:off x="7680960" y="15864840"/>
+            <a:ext cx="182880" cy="3771900"/>
+          </a:xfrm>
+          <a:prstGeom prst="line">
+            <a:avLst/>
+          </a:prstGeom>
+          <a:noFill/>
+          <a:ln w="50800">
+            <a:solidFill>
+              <a:srgbClr val="D9822B"/>
+            </a:solidFill>
+            <a:prstDash val="solid"/>
+          </a:ln>
+        </p:spPr>
+      </p:sp>
+      <p:sp>
+        <p:nvSpPr>
+          <p:cNvPr id="57" name="Shape 55"/>
+          <p:cNvSpPr/>
+          <p:nvPr/>
+        </p:nvSpPr>
+        <p:spPr>
+          <a:xfrm>
+            <a:off x="457200" y="18973800"/>
+            <a:ext cx="7223760" cy="1325880"/>
+          </a:xfrm>
+          <a:prstGeom prst="roundRect">
+            <a:avLst>
+              <a:gd name="adj" fmla="val 17241"/>
+            </a:avLst>
+          </a:prstGeom>
+          <a:solidFill>
+            <a:srgbClr val="FFFFFF"/>
+          </a:solidFill>
+          <a:ln w="38100">
+            <a:solidFill>
+              <a:srgbClr val="D9822B"/>
+            </a:solidFill>
+            <a:prstDash val="solid"/>
+          </a:ln>
+        </p:spPr>
+      </p:sp>
+      <p:sp>
+        <p:nvSpPr>
+          <p:cNvPr id="58" name="Text 56"/>
+          <p:cNvSpPr/>
+          <p:nvPr/>
+        </p:nvSpPr>
+        <p:spPr>
+          <a:xfrm>
+            <a:off x="685800" y="18973800"/>
+            <a:ext cx="6766560" cy="1325880"/>
+          </a:xfrm>
+          <a:prstGeom prst="rect">
+            <a:avLst/>
+          </a:prstGeom>
+          <a:noFill/>
+          <a:ln/>
+        </p:spPr>
+        <p:txBody>
+          <a:bodyPr wrap="square" lIns="0" tIns="0" rIns="0" bIns="0" rtlCol="0" anchor="ctr"/>
+          <a:lstStyle/>
+          <a:p>
+            <a:pPr algn="l" indent="0" marL="0">
+              <a:buNone/>
+            </a:pPr>
+            <a:r>
+              <a:rPr lang="en-US" sz="2500" b="1" dirty="0">
+                <a:solidFill>
+                  <a:srgbClr val="D9822B"/>
+                </a:solidFill>
+                <a:latin typeface="Calibri" pitchFamily="34" charset="0"/>
+                <a:ea typeface="Calibri" pitchFamily="34" charset="-122"/>
+                <a:cs typeface="Calibri" pitchFamily="34" charset="-120"/>
+              </a:rPr>
+              <a:t>Future (company targets)</a:t>
+            </a:r>
+            <a:endParaRPr lang="en-US" sz="2500" dirty="0"/>
+          </a:p>
+          <a:p>
+            <a:pPr algn="l" indent="0" marL="0">
+              <a:buNone/>
+            </a:pPr>
+            <a:r>
+              <a:rPr lang="en-US" sz="2000" dirty="0">
+                <a:solidFill>
+                  <a:srgbClr val="1A1F36"/>
+                </a:solidFill>
+                <a:latin typeface="Calibri" pitchFamily="34" charset="0"/>
+                <a:ea typeface="Calibri" pitchFamily="34" charset="-122"/>
+                <a:cs typeface="Calibri" pitchFamily="34" charset="-120"/>
+              </a:rPr>
+              <a:t>zero own emissions by 2030 · net zero by 2039</a:t>
+            </a:r>
+            <a:endParaRPr lang="en-US" sz="2500" dirty="0"/>
+          </a:p>
+        </p:txBody>
+      </p:sp>
+      <p:sp>
+        <p:nvSpPr>
+          <p:cNvPr id="59" name="Shape 57"/>
+          <p:cNvSpPr/>
+          <p:nvPr/>
+        </p:nvSpPr>
+        <p:spPr>
+          <a:xfrm>
+            <a:off x="7863840" y="14996160"/>
             <a:ext cx="6035040" cy="1737360"/>
           </a:xfrm>
           <a:prstGeom prst="roundRect">
@@ -2792,13 +2898,13 @@
       </p:sp>
       <p:sp>
         <p:nvSpPr>
-          <p:cNvPr id="57" name="Text 55"/>
-          <p:cNvSpPr/>
-          <p:nvPr/>
-        </p:nvSpPr>
-        <p:spPr>
-          <a:xfrm>
-            <a:off x="7863840" y="15224760"/>
+          <p:cNvPr id="60" name="Text 58"/>
+          <p:cNvSpPr/>
+          <p:nvPr/>
+        </p:nvSpPr>
+        <p:spPr>
+          <a:xfrm>
+            <a:off x="7863840" y="14996160"/>
             <a:ext cx="6035040" cy="1737360"/>
           </a:xfrm>
           <a:prstGeom prst="rect">
@@ -2840,7 +2946,7 @@
                 <a:ea typeface="Calibri" pitchFamily="34" charset="-122"/>
                 <a:cs typeface="Calibri" pitchFamily="34" charset="-120"/>
               </a:rPr>
-              <a:t>Economies</a:t>
+              <a:t>Economies + CSR</a:t>
             </a:r>
             <a:endParaRPr lang="en-US" sz="3400" dirty="0"/>
           </a:p>
@@ -2865,14 +2971,14 @@
       </p:sp>
       <p:sp>
         <p:nvSpPr>
-          <p:cNvPr id="58" name="Shape 56"/>
+          <p:cNvPr id="61" name="Shape 59"/>
           <p:cNvSpPr/>
           <p:nvPr/>
         </p:nvSpPr>
         <p:spPr>
           <a:xfrm>
             <a:off x="15137892" y="10972800"/>
-            <a:ext cx="4256532" cy="5120640"/>
+            <a:ext cx="4256532" cy="4892040"/>
           </a:xfrm>
           <a:prstGeom prst="line">
             <a:avLst/>
@@ -2888,14 +2994,14 @@
       </p:sp>
       <p:sp>
         <p:nvSpPr>
-          <p:cNvPr id="59" name="Shape 57"/>
+          <p:cNvPr id="62" name="Shape 60"/>
           <p:cNvSpPr/>
           <p:nvPr/>
         </p:nvSpPr>
         <p:spPr>
           <a:xfrm flipV="1">
-            <a:off x="22411944" y="12765024"/>
-            <a:ext cx="182880" cy="3328416"/>
+            <a:off x="22411944" y="12847320"/>
+            <a:ext cx="182880" cy="3017520"/>
           </a:xfrm>
           <a:prstGeom prst="line">
             <a:avLst/>
@@ -2911,18 +3017,18 @@
       </p:sp>
       <p:sp>
         <p:nvSpPr>
-          <p:cNvPr id="60" name="Shape 58"/>
-          <p:cNvSpPr/>
-          <p:nvPr/>
-        </p:nvSpPr>
-        <p:spPr>
-          <a:xfrm>
-            <a:off x="22594824" y="12056364"/>
-            <a:ext cx="7223760" cy="1417320"/>
+          <p:cNvPr id="63" name="Shape 61"/>
+          <p:cNvSpPr/>
+          <p:nvPr/>
+        </p:nvSpPr>
+        <p:spPr>
+          <a:xfrm>
+            <a:off x="22594824" y="12184380"/>
+            <a:ext cx="7223760" cy="1325880"/>
           </a:xfrm>
           <a:prstGeom prst="roundRect">
             <a:avLst>
-              <a:gd name="adj" fmla="val 16129"/>
+              <a:gd name="adj" fmla="val 17241"/>
             </a:avLst>
           </a:prstGeom>
           <a:solidFill>
@@ -2938,14 +3044,14 @@
       </p:sp>
       <p:sp>
         <p:nvSpPr>
-          <p:cNvPr id="61" name="Text 59"/>
-          <p:cNvSpPr/>
-          <p:nvPr/>
-        </p:nvSpPr>
-        <p:spPr>
-          <a:xfrm>
-            <a:off x="22823424" y="12056364"/>
-            <a:ext cx="6766560" cy="1417320"/>
+          <p:cNvPr id="64" name="Text 62"/>
+          <p:cNvSpPr/>
+          <p:nvPr/>
+        </p:nvSpPr>
+        <p:spPr>
+          <a:xfrm>
+            <a:off x="22823424" y="12184380"/>
+            <a:ext cx="6766560" cy="1325880"/>
           </a:xfrm>
           <a:prstGeom prst="rect">
             <a:avLst/>
@@ -2994,14 +3100,14 @@
       </p:sp>
       <p:sp>
         <p:nvSpPr>
-          <p:cNvPr id="62" name="Shape 60"/>
+          <p:cNvPr id="65" name="Shape 63"/>
           <p:cNvSpPr/>
           <p:nvPr/>
         </p:nvSpPr>
         <p:spPr>
           <a:xfrm flipV="1">
-            <a:off x="22411944" y="14429232"/>
-            <a:ext cx="182880" cy="1664208"/>
+            <a:off x="22411944" y="14356080"/>
+            <a:ext cx="182880" cy="1508760"/>
           </a:xfrm>
           <a:prstGeom prst="line">
             <a:avLst/>
@@ -3017,18 +3123,18 @@
       </p:sp>
       <p:sp>
         <p:nvSpPr>
-          <p:cNvPr id="63" name="Shape 61"/>
-          <p:cNvSpPr/>
-          <p:nvPr/>
-        </p:nvSpPr>
-        <p:spPr>
-          <a:xfrm>
-            <a:off x="22594824" y="13720572"/>
-            <a:ext cx="7223760" cy="1417320"/>
+          <p:cNvPr id="66" name="Shape 64"/>
+          <p:cNvSpPr/>
+          <p:nvPr/>
+        </p:nvSpPr>
+        <p:spPr>
+          <a:xfrm>
+            <a:off x="22594824" y="13693140"/>
+            <a:ext cx="7223760" cy="1325880"/>
           </a:xfrm>
           <a:prstGeom prst="roundRect">
             <a:avLst>
-              <a:gd name="adj" fmla="val 16129"/>
+              <a:gd name="adj" fmla="val 17241"/>
             </a:avLst>
           </a:prstGeom>
           <a:solidFill>
@@ -3044,14 +3150,14 @@
       </p:sp>
       <p:sp>
         <p:nvSpPr>
-          <p:cNvPr id="64" name="Text 62"/>
-          <p:cNvSpPr/>
-          <p:nvPr/>
-        </p:nvSpPr>
-        <p:spPr>
-          <a:xfrm>
-            <a:off x="22823424" y="13720572"/>
-            <a:ext cx="6766560" cy="1417320"/>
+          <p:cNvPr id="67" name="Text 65"/>
+          <p:cNvSpPr/>
+          <p:nvPr/>
+        </p:nvSpPr>
+        <p:spPr>
+          <a:xfrm>
+            <a:off x="22823424" y="13693140"/>
+            <a:ext cx="6766560" cy="1325880"/>
           </a:xfrm>
           <a:prstGeom prst="rect">
             <a:avLst/>
@@ -3100,13 +3206,13 @@
       </p:sp>
       <p:sp>
         <p:nvSpPr>
-          <p:cNvPr id="65" name="Shape 63"/>
-          <p:cNvSpPr/>
-          <p:nvPr/>
-        </p:nvSpPr>
-        <p:spPr>
-          <a:xfrm>
-            <a:off x="22411944" y="16093440"/>
+          <p:cNvPr id="68" name="Shape 66"/>
+          <p:cNvSpPr/>
+          <p:nvPr/>
+        </p:nvSpPr>
+        <p:spPr>
+          <a:xfrm>
+            <a:off x="22411944" y="15864840"/>
             <a:ext cx="182880" cy="9144"/>
           </a:xfrm>
           <a:prstGeom prst="line">
@@ -3123,18 +3229,18 @@
       </p:sp>
       <p:sp>
         <p:nvSpPr>
-          <p:cNvPr id="66" name="Shape 64"/>
-          <p:cNvSpPr/>
-          <p:nvPr/>
-        </p:nvSpPr>
-        <p:spPr>
-          <a:xfrm>
-            <a:off x="22594824" y="15384780"/>
-            <a:ext cx="7223760" cy="1417320"/>
+          <p:cNvPr id="69" name="Shape 67"/>
+          <p:cNvSpPr/>
+          <p:nvPr/>
+        </p:nvSpPr>
+        <p:spPr>
+          <a:xfrm>
+            <a:off x="22594824" y="15201900"/>
+            <a:ext cx="7223760" cy="1325880"/>
           </a:xfrm>
           <a:prstGeom prst="roundRect">
             <a:avLst>
-              <a:gd name="adj" fmla="val 16129"/>
+              <a:gd name="adj" fmla="val 17241"/>
             </a:avLst>
           </a:prstGeom>
           <a:solidFill>
@@ -3150,14 +3256,14 @@
       </p:sp>
       <p:sp>
         <p:nvSpPr>
-          <p:cNvPr id="67" name="Text 65"/>
-          <p:cNvSpPr/>
-          <p:nvPr/>
-        </p:nvSpPr>
-        <p:spPr>
-          <a:xfrm>
-            <a:off x="22823424" y="15384780"/>
-            <a:ext cx="6766560" cy="1417320"/>
+          <p:cNvPr id="70" name="Text 68"/>
+          <p:cNvSpPr/>
+          <p:nvPr/>
+        </p:nvSpPr>
+        <p:spPr>
+          <a:xfrm>
+            <a:off x="22823424" y="15201900"/>
+            <a:ext cx="6766560" cy="1325880"/>
           </a:xfrm>
           <a:prstGeom prst="rect">
             <a:avLst/>
@@ -3206,14 +3312,14 @@
       </p:sp>
       <p:sp>
         <p:nvSpPr>
-          <p:cNvPr id="68" name="Shape 66"/>
-          <p:cNvSpPr/>
-          <p:nvPr/>
-        </p:nvSpPr>
-        <p:spPr>
-          <a:xfrm>
-            <a:off x="22411944" y="16093440"/>
-            <a:ext cx="182880" cy="1664208"/>
+          <p:cNvPr id="71" name="Shape 69"/>
+          <p:cNvSpPr/>
+          <p:nvPr/>
+        </p:nvSpPr>
+        <p:spPr>
+          <a:xfrm>
+            <a:off x="22411944" y="15864840"/>
+            <a:ext cx="182880" cy="1508760"/>
           </a:xfrm>
           <a:prstGeom prst="line">
             <a:avLst/>
@@ -3229,18 +3335,18 @@
       </p:sp>
       <p:sp>
         <p:nvSpPr>
-          <p:cNvPr id="69" name="Shape 67"/>
-          <p:cNvSpPr/>
-          <p:nvPr/>
-        </p:nvSpPr>
-        <p:spPr>
-          <a:xfrm>
-            <a:off x="22594824" y="17048988"/>
-            <a:ext cx="7223760" cy="1417320"/>
+          <p:cNvPr id="72" name="Shape 70"/>
+          <p:cNvSpPr/>
+          <p:nvPr/>
+        </p:nvSpPr>
+        <p:spPr>
+          <a:xfrm>
+            <a:off x="22594824" y="16710660"/>
+            <a:ext cx="7223760" cy="1325880"/>
           </a:xfrm>
           <a:prstGeom prst="roundRect">
             <a:avLst>
-              <a:gd name="adj" fmla="val 16129"/>
+              <a:gd name="adj" fmla="val 17241"/>
             </a:avLst>
           </a:prstGeom>
           <a:solidFill>
@@ -3256,14 +3362,14 @@
       </p:sp>
       <p:sp>
         <p:nvSpPr>
-          <p:cNvPr id="70" name="Text 68"/>
-          <p:cNvSpPr/>
-          <p:nvPr/>
-        </p:nvSpPr>
-        <p:spPr>
-          <a:xfrm>
-            <a:off x="22823424" y="17048988"/>
-            <a:ext cx="6766560" cy="1417320"/>
+          <p:cNvPr id="73" name="Text 71"/>
+          <p:cNvSpPr/>
+          <p:nvPr/>
+        </p:nvSpPr>
+        <p:spPr>
+          <a:xfrm>
+            <a:off x="22823424" y="16710660"/>
+            <a:ext cx="6766560" cy="1325880"/>
           </a:xfrm>
           <a:prstGeom prst="rect">
             <a:avLst/>
@@ -3329,14 +3435,14 @@
       </p:sp>
       <p:sp>
         <p:nvSpPr>
-          <p:cNvPr id="71" name="Shape 69"/>
-          <p:cNvSpPr/>
-          <p:nvPr/>
-        </p:nvSpPr>
-        <p:spPr>
-          <a:xfrm>
-            <a:off x="22411944" y="16093440"/>
-            <a:ext cx="182880" cy="3328416"/>
+          <p:cNvPr id="74" name="Shape 72"/>
+          <p:cNvSpPr/>
+          <p:nvPr/>
+        </p:nvSpPr>
+        <p:spPr>
+          <a:xfrm>
+            <a:off x="22411944" y="15864840"/>
+            <a:ext cx="182880" cy="3017520"/>
           </a:xfrm>
           <a:prstGeom prst="line">
             <a:avLst/>
@@ -3352,18 +3458,18 @@
       </p:sp>
       <p:sp>
         <p:nvSpPr>
-          <p:cNvPr id="72" name="Shape 70"/>
-          <p:cNvSpPr/>
-          <p:nvPr/>
-        </p:nvSpPr>
-        <p:spPr>
-          <a:xfrm>
-            <a:off x="22594824" y="18713196"/>
-            <a:ext cx="7223760" cy="1417320"/>
+          <p:cNvPr id="75" name="Shape 73"/>
+          <p:cNvSpPr/>
+          <p:nvPr/>
+        </p:nvSpPr>
+        <p:spPr>
+          <a:xfrm>
+            <a:off x="22594824" y="18219420"/>
+            <a:ext cx="7223760" cy="1325880"/>
           </a:xfrm>
           <a:prstGeom prst="roundRect">
             <a:avLst>
-              <a:gd name="adj" fmla="val 16129"/>
+              <a:gd name="adj" fmla="val 17241"/>
             </a:avLst>
           </a:prstGeom>
           <a:solidFill>
@@ -3379,14 +3485,14 @@
       </p:sp>
       <p:sp>
         <p:nvSpPr>
-          <p:cNvPr id="73" name="Text 71"/>
-          <p:cNvSpPr/>
-          <p:nvPr/>
-        </p:nvSpPr>
-        <p:spPr>
-          <a:xfrm>
-            <a:off x="22823424" y="18713196"/>
-            <a:ext cx="6766560" cy="1417320"/>
+          <p:cNvPr id="76" name="Text 74"/>
+          <p:cNvSpPr/>
+          <p:nvPr/>
+        </p:nvSpPr>
+        <p:spPr>
+          <a:xfrm>
+            <a:off x="22823424" y="18219420"/>
+            <a:ext cx="6766560" cy="1325880"/>
           </a:xfrm>
           <a:prstGeom prst="rect">
             <a:avLst/>
@@ -3435,13 +3541,13 @@
       </p:sp>
       <p:sp>
         <p:nvSpPr>
-          <p:cNvPr id="74" name="Shape 72"/>
-          <p:cNvSpPr/>
-          <p:nvPr/>
-        </p:nvSpPr>
-        <p:spPr>
-          <a:xfrm>
-            <a:off x="16376904" y="15224760"/>
+          <p:cNvPr id="77" name="Shape 75"/>
+          <p:cNvSpPr/>
+          <p:nvPr/>
+        </p:nvSpPr>
+        <p:spPr>
+          <a:xfrm>
+            <a:off x="16376904" y="14996160"/>
             <a:ext cx="6035040" cy="1737360"/>
           </a:xfrm>
           <a:prstGeom prst="roundRect">
@@ -3457,13 +3563,13 @@
       </p:sp>
       <p:sp>
         <p:nvSpPr>
-          <p:cNvPr id="75" name="Text 73"/>
-          <p:cNvSpPr/>
-          <p:nvPr/>
-        </p:nvSpPr>
-        <p:spPr>
-          <a:xfrm>
-            <a:off x="16376904" y="15224760"/>
+          <p:cNvPr id="78" name="Text 76"/>
+          <p:cNvSpPr/>
+          <p:nvPr/>
+        </p:nvSpPr>
+        <p:spPr>
+          <a:xfrm>
+            <a:off x="16376904" y="14996160"/>
             <a:ext cx="6035040" cy="1737360"/>
           </a:xfrm>
           <a:prstGeom prst="rect">
@@ -3513,7 +3619,7 @@
       </p:sp>
       <p:sp>
         <p:nvSpPr>
-          <p:cNvPr id="76" name="Shape 74"/>
+          <p:cNvPr id="79" name="Shape 77"/>
           <p:cNvSpPr/>
           <p:nvPr/>
         </p:nvSpPr>
@@ -3538,7 +3644,7 @@
       </p:sp>
       <p:sp>
         <p:nvSpPr>
-          <p:cNvPr id="77" name="Text 75"/>
+          <p:cNvPr id="80" name="Text 78"/>
           <p:cNvSpPr/>
           <p:nvPr/>
         </p:nvSpPr>
@@ -3611,7 +3717,7 @@
       </p:sp>
       <p:sp>
         <p:nvSpPr>
-          <p:cNvPr id="78" name="Text 76"/>
+          <p:cNvPr id="81" name="Text 79"/>
           <p:cNvSpPr/>
           <p:nvPr/>
         </p:nvSpPr>

--- a/content/busi1763/files/Unilever_MindMap_A1.pptx
+++ b/content/busi1763/files/Unilever_MindMap_A1.pptx
@@ -2851,7 +2851,7 @@
                 <a:ea typeface="Calibri" pitchFamily="34" charset="-122"/>
                 <a:cs typeface="Calibri" pitchFamily="34" charset="-120"/>
               </a:rPr>
-              <a:t>Future (company targets)</a:t>
+              <a:t>Critical view: purpose vs profit</a:t>
             </a:r>
             <a:endParaRPr lang="en-US" sz="2500" dirty="0"/>
           </a:p>
@@ -2868,7 +2868,7 @@
                 <a:ea typeface="Calibri" pitchFamily="34" charset="-122"/>
                 <a:cs typeface="Calibri" pitchFamily="34" charset="-120"/>
               </a:rPr>
-              <a:t>zero own emissions by 2030 · net zero by 2039</a:t>
+              <a:t>Terry Smith: "lost the plot" (Jan 2022) · UK CMA probe (Dec 2023 – Nov 2024)</a:t>
             </a:r>
             <a:endParaRPr lang="en-US" sz="2500" dirty="0"/>
           </a:p>
